--- a/slides/04-4-DividingResources.pptx
+++ b/slides/04-4-DividingResources.pptx
@@ -208,7 +208,7 @@
           <a:p>
             <a:fld id="{C5B45307-6ED4-B142-BD64-10F739779302}" type="datetimeFigureOut">
               <a:rPr lang="en-US" smtClean="0"/>
-              <a:t>8/27/25</a:t>
+              <a:t>10/7/25</a:t>
             </a:fld>
             <a:endParaRPr lang="en-US"/>
           </a:p>
@@ -616,7 +616,7 @@
           <a:noFill/>
           <a:extLst>
             <a:ext uri="{909E8E84-426E-40dd-AFC4-6F175D3DCCD1}">
-              <a14:hiddenFill xmlns:a14="http://schemas.microsoft.com/office/drawing/2010/main" xmlns="">
+              <a14:hiddenFill xmlns="" xmlns:a14="http://schemas.microsoft.com/office/drawing/2010/main">
                 <a:solidFill>
                   <a:srgbClr val="FFFFFF"/>
                 </a:solidFill>
@@ -675,7 +675,7 @@
             </a:ln>
             <a:extLst>
               <a:ext uri="{91240B29-F687-4f45-9708-019B960494DF}">
-                <a14:hiddenLine xmlns:a14="http://schemas.microsoft.com/office/drawing/2010/main" xmlns="" w="9525">
+                <a14:hiddenLine xmlns="" xmlns:a14="http://schemas.microsoft.com/office/drawing/2010/main" w="9525">
                   <a:solidFill>
                     <a:srgbClr val="000000"/>
                   </a:solidFill>
@@ -765,7 +765,7 @@
             </a:ln>
             <a:extLst>
               <a:ext uri="{91240B29-F687-4f45-9708-019B960494DF}">
-                <a14:hiddenLine xmlns:a14="http://schemas.microsoft.com/office/drawing/2010/main" xmlns="" w="9525">
+                <a14:hiddenLine xmlns="" xmlns:a14="http://schemas.microsoft.com/office/drawing/2010/main" w="9525">
                   <a:solidFill>
                     <a:srgbClr val="000000"/>
                   </a:solidFill>
@@ -855,7 +855,7 @@
             </a:ln>
             <a:extLst>
               <a:ext uri="{91240B29-F687-4f45-9708-019B960494DF}">
-                <a14:hiddenLine xmlns:a14="http://schemas.microsoft.com/office/drawing/2010/main" xmlns="" w="9525">
+                <a14:hiddenLine xmlns="" xmlns:a14="http://schemas.microsoft.com/office/drawing/2010/main" w="9525">
                   <a:solidFill>
                     <a:srgbClr val="000000"/>
                   </a:solidFill>
@@ -889,7 +889,7 @@
             </a:ln>
             <a:extLst>
               <a:ext uri="{91240B29-F687-4f45-9708-019B960494DF}">
-                <a14:hiddenLine xmlns:a14="http://schemas.microsoft.com/office/drawing/2010/main" xmlns="" w="9525">
+                <a14:hiddenLine xmlns="" xmlns:a14="http://schemas.microsoft.com/office/drawing/2010/main" w="9525">
                   <a:solidFill>
                     <a:srgbClr val="000000"/>
                   </a:solidFill>
@@ -979,7 +979,7 @@
             </a:ln>
             <a:extLst>
               <a:ext uri="{91240B29-F687-4f45-9708-019B960494DF}">
-                <a14:hiddenLine xmlns:a14="http://schemas.microsoft.com/office/drawing/2010/main" xmlns="" w="9525">
+                <a14:hiddenLine xmlns="" xmlns:a14="http://schemas.microsoft.com/office/drawing/2010/main" w="9525">
                   <a:solidFill>
                     <a:srgbClr val="000000"/>
                   </a:solidFill>
@@ -1041,7 +1041,7 @@
             </a:ln>
             <a:extLst>
               <a:ext uri="{91240B29-F687-4f45-9708-019B960494DF}">
-                <a14:hiddenLine xmlns:a14="http://schemas.microsoft.com/office/drawing/2010/main" xmlns="" w="9525">
+                <a14:hiddenLine xmlns="" xmlns:a14="http://schemas.microsoft.com/office/drawing/2010/main" w="9525">
                   <a:solidFill>
                     <a:srgbClr val="000000"/>
                   </a:solidFill>
@@ -1103,7 +1103,7 @@
             </a:ln>
             <a:extLst>
               <a:ext uri="{91240B29-F687-4f45-9708-019B960494DF}">
-                <a14:hiddenLine xmlns:a14="http://schemas.microsoft.com/office/drawing/2010/main" xmlns="" w="9525">
+                <a14:hiddenLine xmlns="" xmlns:a14="http://schemas.microsoft.com/office/drawing/2010/main" w="9525">
                   <a:solidFill>
                     <a:srgbClr val="000000"/>
                   </a:solidFill>
@@ -1193,7 +1193,7 @@
             </a:ln>
             <a:extLst>
               <a:ext uri="{91240B29-F687-4f45-9708-019B960494DF}">
-                <a14:hiddenLine xmlns:a14="http://schemas.microsoft.com/office/drawing/2010/main" xmlns="" w="9525">
+                <a14:hiddenLine xmlns="" xmlns:a14="http://schemas.microsoft.com/office/drawing/2010/main" w="9525">
                   <a:solidFill>
                     <a:srgbClr val="000000"/>
                   </a:solidFill>
@@ -1255,7 +1255,7 @@
             </a:ln>
             <a:extLst>
               <a:ext uri="{91240B29-F687-4f45-9708-019B960494DF}">
-                <a14:hiddenLine xmlns:a14="http://schemas.microsoft.com/office/drawing/2010/main" xmlns="" w="9525">
+                <a14:hiddenLine xmlns="" xmlns:a14="http://schemas.microsoft.com/office/drawing/2010/main" w="9525">
                   <a:solidFill>
                     <a:srgbClr val="000000"/>
                   </a:solidFill>
@@ -1317,7 +1317,7 @@
             </a:ln>
             <a:extLst>
               <a:ext uri="{91240B29-F687-4f45-9708-019B960494DF}">
-                <a14:hiddenLine xmlns:a14="http://schemas.microsoft.com/office/drawing/2010/main" xmlns="" w="9525">
+                <a14:hiddenLine xmlns="" xmlns:a14="http://schemas.microsoft.com/office/drawing/2010/main" w="9525">
                   <a:solidFill>
                     <a:srgbClr val="000000"/>
                   </a:solidFill>
@@ -1407,7 +1407,7 @@
             </a:ln>
             <a:extLst>
               <a:ext uri="{91240B29-F687-4f45-9708-019B960494DF}">
-                <a14:hiddenLine xmlns:a14="http://schemas.microsoft.com/office/drawing/2010/main" xmlns="" w="9525">
+                <a14:hiddenLine xmlns="" xmlns:a14="http://schemas.microsoft.com/office/drawing/2010/main" w="9525">
                   <a:solidFill>
                     <a:srgbClr val="000000"/>
                   </a:solidFill>
@@ -1497,7 +1497,7 @@
             </a:ln>
             <a:extLst>
               <a:ext uri="{91240B29-F687-4f45-9708-019B960494DF}">
-                <a14:hiddenLine xmlns:a14="http://schemas.microsoft.com/office/drawing/2010/main" xmlns="" w="9525">
+                <a14:hiddenLine xmlns="" xmlns:a14="http://schemas.microsoft.com/office/drawing/2010/main" w="9525">
                   <a:solidFill>
                     <a:srgbClr val="000000"/>
                   </a:solidFill>
@@ -1559,7 +1559,7 @@
             </a:ln>
             <a:extLst>
               <a:ext uri="{91240B29-F687-4f45-9708-019B960494DF}">
-                <a14:hiddenLine xmlns:a14="http://schemas.microsoft.com/office/drawing/2010/main" xmlns="" w="9525">
+                <a14:hiddenLine xmlns="" xmlns:a14="http://schemas.microsoft.com/office/drawing/2010/main" w="9525">
                   <a:solidFill>
                     <a:srgbClr val="000000"/>
                   </a:solidFill>
@@ -1669,7 +1669,7 @@
             </a:ln>
             <a:extLst>
               <a:ext uri="{91240B29-F687-4f45-9708-019B960494DF}">
-                <a14:hiddenLine xmlns:a14="http://schemas.microsoft.com/office/drawing/2010/main" xmlns="" w="9525">
+                <a14:hiddenLine xmlns="" xmlns:a14="http://schemas.microsoft.com/office/drawing/2010/main" w="9525">
                   <a:solidFill>
                     <a:srgbClr val="000000"/>
                   </a:solidFill>
@@ -1731,7 +1731,7 @@
             </a:ln>
             <a:extLst>
               <a:ext uri="{91240B29-F687-4f45-9708-019B960494DF}">
-                <a14:hiddenLine xmlns:a14="http://schemas.microsoft.com/office/drawing/2010/main" xmlns="" w="9525">
+                <a14:hiddenLine xmlns="" xmlns:a14="http://schemas.microsoft.com/office/drawing/2010/main" w="9525">
                   <a:solidFill>
                     <a:srgbClr val="000000"/>
                   </a:solidFill>
@@ -1821,7 +1821,7 @@
             </a:ln>
             <a:extLst>
               <a:ext uri="{91240B29-F687-4f45-9708-019B960494DF}">
-                <a14:hiddenLine xmlns:a14="http://schemas.microsoft.com/office/drawing/2010/main" xmlns="" w="9525">
+                <a14:hiddenLine xmlns="" xmlns:a14="http://schemas.microsoft.com/office/drawing/2010/main" w="9525">
                   <a:solidFill>
                     <a:srgbClr val="000000"/>
                   </a:solidFill>
@@ -1911,7 +1911,7 @@
             </a:ln>
             <a:extLst>
               <a:ext uri="{91240B29-F687-4f45-9708-019B960494DF}">
-                <a14:hiddenLine xmlns:a14="http://schemas.microsoft.com/office/drawing/2010/main" xmlns="" w="9525">
+                <a14:hiddenLine xmlns="" xmlns:a14="http://schemas.microsoft.com/office/drawing/2010/main" w="9525">
                   <a:solidFill>
                     <a:srgbClr val="000000"/>
                   </a:solidFill>
@@ -1973,7 +1973,7 @@
             </a:ln>
             <a:extLst>
               <a:ext uri="{91240B29-F687-4f45-9708-019B960494DF}">
-                <a14:hiddenLine xmlns:a14="http://schemas.microsoft.com/office/drawing/2010/main" xmlns="" w="9525">
+                <a14:hiddenLine xmlns="" xmlns:a14="http://schemas.microsoft.com/office/drawing/2010/main" w="9525">
                   <a:solidFill>
                     <a:srgbClr val="000000"/>
                   </a:solidFill>
@@ -2063,7 +2063,7 @@
             </a:ln>
             <a:extLst>
               <a:ext uri="{91240B29-F687-4f45-9708-019B960494DF}">
-                <a14:hiddenLine xmlns:a14="http://schemas.microsoft.com/office/drawing/2010/main" xmlns="" w="9525">
+                <a14:hiddenLine xmlns="" xmlns:a14="http://schemas.microsoft.com/office/drawing/2010/main" w="9525">
                   <a:solidFill>
                     <a:srgbClr val="000000"/>
                   </a:solidFill>
@@ -2153,7 +2153,7 @@
             </a:ln>
             <a:extLst>
               <a:ext uri="{91240B29-F687-4f45-9708-019B960494DF}">
-                <a14:hiddenLine xmlns:a14="http://schemas.microsoft.com/office/drawing/2010/main" xmlns="" w="9525">
+                <a14:hiddenLine xmlns="" xmlns:a14="http://schemas.microsoft.com/office/drawing/2010/main" w="9525">
                   <a:solidFill>
                     <a:srgbClr val="000000"/>
                   </a:solidFill>
@@ -2209,7 +2209,7 @@
             </a:ln>
             <a:extLst>
               <a:ext uri="{91240B29-F687-4f45-9708-019B960494DF}">
-                <a14:hiddenLine xmlns:a14="http://schemas.microsoft.com/office/drawing/2010/main" xmlns="" w="9525">
+                <a14:hiddenLine xmlns="" xmlns:a14="http://schemas.microsoft.com/office/drawing/2010/main" w="9525">
                   <a:solidFill>
                     <a:srgbClr val="000000"/>
                   </a:solidFill>
@@ -2299,7 +2299,7 @@
             </a:ln>
             <a:extLst>
               <a:ext uri="{91240B29-F687-4f45-9708-019B960494DF}">
-                <a14:hiddenLine xmlns:a14="http://schemas.microsoft.com/office/drawing/2010/main" xmlns="" w="9525">
+                <a14:hiddenLine xmlns="" xmlns:a14="http://schemas.microsoft.com/office/drawing/2010/main" w="9525">
                   <a:solidFill>
                     <a:srgbClr val="000000"/>
                   </a:solidFill>
@@ -2355,7 +2355,7 @@
             </a:ln>
             <a:extLst>
               <a:ext uri="{91240B29-F687-4f45-9708-019B960494DF}">
-                <a14:hiddenLine xmlns:a14="http://schemas.microsoft.com/office/drawing/2010/main" xmlns="" w="9525">
+                <a14:hiddenLine xmlns="" xmlns:a14="http://schemas.microsoft.com/office/drawing/2010/main" w="9525">
                   <a:solidFill>
                     <a:srgbClr val="000000"/>
                   </a:solidFill>
@@ -2445,7 +2445,7 @@
             </a:ln>
             <a:extLst>
               <a:ext uri="{91240B29-F687-4f45-9708-019B960494DF}">
-                <a14:hiddenLine xmlns:a14="http://schemas.microsoft.com/office/drawing/2010/main" xmlns="" w="9525">
+                <a14:hiddenLine xmlns="" xmlns:a14="http://schemas.microsoft.com/office/drawing/2010/main" w="9525">
                   <a:solidFill>
                     <a:srgbClr val="000000"/>
                   </a:solidFill>
@@ -2513,7 +2513,7 @@
             </a:ln>
             <a:extLst>
               <a:ext uri="{91240B29-F687-4f45-9708-019B960494DF}">
-                <a14:hiddenLine xmlns:a14="http://schemas.microsoft.com/office/drawing/2010/main" xmlns="" w="9525">
+                <a14:hiddenLine xmlns="" xmlns:a14="http://schemas.microsoft.com/office/drawing/2010/main" w="9525">
                   <a:solidFill>
                     <a:srgbClr val="000000"/>
                   </a:solidFill>
@@ -2603,7 +2603,7 @@
             </a:ln>
             <a:extLst>
               <a:ext uri="{91240B29-F687-4f45-9708-019B960494DF}">
-                <a14:hiddenLine xmlns:a14="http://schemas.microsoft.com/office/drawing/2010/main" xmlns="" w="9525">
+                <a14:hiddenLine xmlns="" xmlns:a14="http://schemas.microsoft.com/office/drawing/2010/main" w="9525">
                   <a:solidFill>
                     <a:srgbClr val="000000"/>
                   </a:solidFill>
@@ -2671,7 +2671,7 @@
             </a:ln>
             <a:extLst>
               <a:ext uri="{91240B29-F687-4f45-9708-019B960494DF}">
-                <a14:hiddenLine xmlns:a14="http://schemas.microsoft.com/office/drawing/2010/main" xmlns="" w="9525">
+                <a14:hiddenLine xmlns="" xmlns:a14="http://schemas.microsoft.com/office/drawing/2010/main" w="9525">
                   <a:solidFill>
                     <a:srgbClr val="000000"/>
                   </a:solidFill>
@@ -2761,7 +2761,7 @@
             </a:ln>
             <a:extLst>
               <a:ext uri="{91240B29-F687-4f45-9708-019B960494DF}">
-                <a14:hiddenLine xmlns:a14="http://schemas.microsoft.com/office/drawing/2010/main" xmlns="" w="9525">
+                <a14:hiddenLine xmlns="" xmlns:a14="http://schemas.microsoft.com/office/drawing/2010/main" w="9525">
                   <a:solidFill>
                     <a:srgbClr val="000000"/>
                   </a:solidFill>
@@ -2795,7 +2795,7 @@
             </a:ln>
             <a:extLst>
               <a:ext uri="{91240B29-F687-4f45-9708-019B960494DF}">
-                <a14:hiddenLine xmlns:a14="http://schemas.microsoft.com/office/drawing/2010/main" xmlns="" w="9525">
+                <a14:hiddenLine xmlns="" xmlns:a14="http://schemas.microsoft.com/office/drawing/2010/main" w="9525">
                   <a:solidFill>
                     <a:srgbClr val="000000"/>
                   </a:solidFill>
@@ -2885,7 +2885,7 @@
             </a:ln>
             <a:extLst>
               <a:ext uri="{91240B29-F687-4f45-9708-019B960494DF}">
-                <a14:hiddenLine xmlns:a14="http://schemas.microsoft.com/office/drawing/2010/main" xmlns="" w="9525">
+                <a14:hiddenLine xmlns="" xmlns:a14="http://schemas.microsoft.com/office/drawing/2010/main" w="9525">
                   <a:solidFill>
                     <a:srgbClr val="000000"/>
                   </a:solidFill>
@@ -2947,7 +2947,7 @@
             </a:ln>
             <a:extLst>
               <a:ext uri="{91240B29-F687-4f45-9708-019B960494DF}">
-                <a14:hiddenLine xmlns:a14="http://schemas.microsoft.com/office/drawing/2010/main" xmlns="" w="9525">
+                <a14:hiddenLine xmlns="" xmlns:a14="http://schemas.microsoft.com/office/drawing/2010/main" w="9525">
                   <a:solidFill>
                     <a:srgbClr val="000000"/>
                   </a:solidFill>
@@ -3009,7 +3009,7 @@
             </a:ln>
             <a:extLst>
               <a:ext uri="{91240B29-F687-4f45-9708-019B960494DF}">
-                <a14:hiddenLine xmlns:a14="http://schemas.microsoft.com/office/drawing/2010/main" xmlns="" w="9525">
+                <a14:hiddenLine xmlns="" xmlns:a14="http://schemas.microsoft.com/office/drawing/2010/main" w="9525">
                   <a:solidFill>
                     <a:srgbClr val="000000"/>
                   </a:solidFill>
@@ -3099,7 +3099,7 @@
             </a:ln>
             <a:extLst>
               <a:ext uri="{91240B29-F687-4f45-9708-019B960494DF}">
-                <a14:hiddenLine xmlns:a14="http://schemas.microsoft.com/office/drawing/2010/main" xmlns="" w="9525">
+                <a14:hiddenLine xmlns="" xmlns:a14="http://schemas.microsoft.com/office/drawing/2010/main" w="9525">
                   <a:solidFill>
                     <a:srgbClr val="000000"/>
                   </a:solidFill>
@@ -3167,7 +3167,7 @@
             </a:ln>
             <a:extLst>
               <a:ext uri="{91240B29-F687-4f45-9708-019B960494DF}">
-                <a14:hiddenLine xmlns:a14="http://schemas.microsoft.com/office/drawing/2010/main" xmlns="" w="9525">
+                <a14:hiddenLine xmlns="" xmlns:a14="http://schemas.microsoft.com/office/drawing/2010/main" w="9525">
                   <a:solidFill>
                     <a:srgbClr val="000000"/>
                   </a:solidFill>
@@ -3229,7 +3229,7 @@
             </a:ln>
             <a:extLst>
               <a:ext uri="{91240B29-F687-4f45-9708-019B960494DF}">
-                <a14:hiddenLine xmlns:a14="http://schemas.microsoft.com/office/drawing/2010/main" xmlns="" w="9525">
+                <a14:hiddenLine xmlns="" xmlns:a14="http://schemas.microsoft.com/office/drawing/2010/main" w="9525">
                   <a:solidFill>
                     <a:srgbClr val="000000"/>
                   </a:solidFill>
@@ -3319,7 +3319,7 @@
             </a:ln>
             <a:extLst>
               <a:ext uri="{91240B29-F687-4f45-9708-019B960494DF}">
-                <a14:hiddenLine xmlns:a14="http://schemas.microsoft.com/office/drawing/2010/main" xmlns="" w="9525">
+                <a14:hiddenLine xmlns="" xmlns:a14="http://schemas.microsoft.com/office/drawing/2010/main" w="9525">
                   <a:solidFill>
                     <a:srgbClr val="000000"/>
                   </a:solidFill>
@@ -3381,7 +3381,7 @@
             </a:ln>
             <a:extLst>
               <a:ext uri="{91240B29-F687-4f45-9708-019B960494DF}">
-                <a14:hiddenLine xmlns:a14="http://schemas.microsoft.com/office/drawing/2010/main" xmlns="" w="9525">
+                <a14:hiddenLine xmlns="" xmlns:a14="http://schemas.microsoft.com/office/drawing/2010/main" w="9525">
                   <a:solidFill>
                     <a:srgbClr val="000000"/>
                   </a:solidFill>
@@ -3471,7 +3471,7 @@
             </a:ln>
             <a:extLst>
               <a:ext uri="{91240B29-F687-4f45-9708-019B960494DF}">
-                <a14:hiddenLine xmlns:a14="http://schemas.microsoft.com/office/drawing/2010/main" xmlns="" w="9525">
+                <a14:hiddenLine xmlns="" xmlns:a14="http://schemas.microsoft.com/office/drawing/2010/main" w="9525">
                   <a:solidFill>
                     <a:srgbClr val="000000"/>
                   </a:solidFill>
@@ -3533,7 +3533,7 @@
             </a:ln>
             <a:extLst>
               <a:ext uri="{91240B29-F687-4f45-9708-019B960494DF}">
-                <a14:hiddenLine xmlns:a14="http://schemas.microsoft.com/office/drawing/2010/main" xmlns="" w="9525">
+                <a14:hiddenLine xmlns="" xmlns:a14="http://schemas.microsoft.com/office/drawing/2010/main" w="9525">
                   <a:solidFill>
                     <a:srgbClr val="000000"/>
                   </a:solidFill>
@@ -3623,7 +3623,7 @@
             </a:ln>
             <a:extLst>
               <a:ext uri="{91240B29-F687-4f45-9708-019B960494DF}">
-                <a14:hiddenLine xmlns:a14="http://schemas.microsoft.com/office/drawing/2010/main" xmlns="" w="9525">
+                <a14:hiddenLine xmlns="" xmlns:a14="http://schemas.microsoft.com/office/drawing/2010/main" w="9525">
                   <a:solidFill>
                     <a:srgbClr val="000000"/>
                   </a:solidFill>
@@ -3657,7 +3657,7 @@
             </a:ln>
             <a:extLst>
               <a:ext uri="{91240B29-F687-4f45-9708-019B960494DF}">
-                <a14:hiddenLine xmlns:a14="http://schemas.microsoft.com/office/drawing/2010/main" xmlns="" w="9525">
+                <a14:hiddenLine xmlns="" xmlns:a14="http://schemas.microsoft.com/office/drawing/2010/main" w="9525">
                   <a:solidFill>
                     <a:srgbClr val="000000"/>
                   </a:solidFill>
@@ -3722,7 +3722,7 @@
             </a:ln>
             <a:extLst>
               <a:ext uri="{91240B29-F687-4f45-9708-019B960494DF}">
-                <a14:hiddenLine xmlns:a14="http://schemas.microsoft.com/office/drawing/2010/main" xmlns="" w="9525">
+                <a14:hiddenLine xmlns="" xmlns:a14="http://schemas.microsoft.com/office/drawing/2010/main" w="9525">
                   <a:solidFill>
                     <a:srgbClr val="000000"/>
                   </a:solidFill>
@@ -3812,7 +3812,7 @@
             </a:ln>
             <a:extLst>
               <a:ext uri="{91240B29-F687-4f45-9708-019B960494DF}">
-                <a14:hiddenLine xmlns:a14="http://schemas.microsoft.com/office/drawing/2010/main" xmlns="" w="9525">
+                <a14:hiddenLine xmlns="" xmlns:a14="http://schemas.microsoft.com/office/drawing/2010/main" w="9525">
                   <a:solidFill>
                     <a:srgbClr val="000000"/>
                   </a:solidFill>
@@ -3874,7 +3874,7 @@
             </a:ln>
             <a:extLst>
               <a:ext uri="{91240B29-F687-4f45-9708-019B960494DF}">
-                <a14:hiddenLine xmlns:a14="http://schemas.microsoft.com/office/drawing/2010/main" xmlns="" w="9525">
+                <a14:hiddenLine xmlns="" xmlns:a14="http://schemas.microsoft.com/office/drawing/2010/main" w="9525">
                   <a:solidFill>
                     <a:srgbClr val="000000"/>
                   </a:solidFill>
@@ -3964,7 +3964,7 @@
             </a:ln>
             <a:extLst>
               <a:ext uri="{91240B29-F687-4f45-9708-019B960494DF}">
-                <a14:hiddenLine xmlns:a14="http://schemas.microsoft.com/office/drawing/2010/main" xmlns="" w="9525">
+                <a14:hiddenLine xmlns="" xmlns:a14="http://schemas.microsoft.com/office/drawing/2010/main" w="9525">
                   <a:solidFill>
                     <a:srgbClr val="000000"/>
                   </a:solidFill>
@@ -4054,7 +4054,7 @@
             </a:ln>
             <a:extLst>
               <a:ext uri="{91240B29-F687-4f45-9708-019B960494DF}">
-                <a14:hiddenLine xmlns:a14="http://schemas.microsoft.com/office/drawing/2010/main" xmlns="" w="9525">
+                <a14:hiddenLine xmlns="" xmlns:a14="http://schemas.microsoft.com/office/drawing/2010/main" w="9525">
                   <a:solidFill>
                     <a:srgbClr val="000000"/>
                   </a:solidFill>
@@ -4119,7 +4119,7 @@
             </a:ln>
             <a:extLst>
               <a:ext uri="{91240B29-F687-4f45-9708-019B960494DF}">
-                <a14:hiddenLine xmlns:a14="http://schemas.microsoft.com/office/drawing/2010/main" xmlns="" w="9525">
+                <a14:hiddenLine xmlns="" xmlns:a14="http://schemas.microsoft.com/office/drawing/2010/main" w="9525">
                   <a:solidFill>
                     <a:srgbClr val="000000"/>
                   </a:solidFill>
@@ -4181,7 +4181,7 @@
             </a:ln>
             <a:extLst>
               <a:ext uri="{91240B29-F687-4f45-9708-019B960494DF}">
-                <a14:hiddenLine xmlns:a14="http://schemas.microsoft.com/office/drawing/2010/main" xmlns="" w="9525">
+                <a14:hiddenLine xmlns="" xmlns:a14="http://schemas.microsoft.com/office/drawing/2010/main" w="9525">
                   <a:solidFill>
                     <a:srgbClr val="000000"/>
                   </a:solidFill>
@@ -4271,7 +4271,7 @@
             </a:ln>
             <a:extLst>
               <a:ext uri="{91240B29-F687-4f45-9708-019B960494DF}">
-                <a14:hiddenLine xmlns:a14="http://schemas.microsoft.com/office/drawing/2010/main" xmlns="" w="9525">
+                <a14:hiddenLine xmlns="" xmlns:a14="http://schemas.microsoft.com/office/drawing/2010/main" w="9525">
                   <a:solidFill>
                     <a:srgbClr val="000000"/>
                   </a:solidFill>
@@ -4361,7 +4361,7 @@
             </a:ln>
             <a:extLst>
               <a:ext uri="{91240B29-F687-4f45-9708-019B960494DF}">
-                <a14:hiddenLine xmlns:a14="http://schemas.microsoft.com/office/drawing/2010/main" xmlns="" w="9525">
+                <a14:hiddenLine xmlns="" xmlns:a14="http://schemas.microsoft.com/office/drawing/2010/main" w="9525">
                   <a:solidFill>
                     <a:srgbClr val="000000"/>
                   </a:solidFill>
@@ -4423,7 +4423,7 @@
             </a:ln>
             <a:extLst>
               <a:ext uri="{91240B29-F687-4f45-9708-019B960494DF}">
-                <a14:hiddenLine xmlns:a14="http://schemas.microsoft.com/office/drawing/2010/main" xmlns="" w="9525">
+                <a14:hiddenLine xmlns="" xmlns:a14="http://schemas.microsoft.com/office/drawing/2010/main" w="9525">
                   <a:solidFill>
                     <a:srgbClr val="000000"/>
                   </a:solidFill>
@@ -4543,7 +4543,7 @@
             </a:ln>
             <a:extLst>
               <a:ext uri="{91240B29-F687-4f45-9708-019B960494DF}">
-                <a14:hiddenLine xmlns:a14="http://schemas.microsoft.com/office/drawing/2010/main" xmlns="" w="9525">
+                <a14:hiddenLine xmlns="" xmlns:a14="http://schemas.microsoft.com/office/drawing/2010/main" w="9525">
                   <a:solidFill>
                     <a:srgbClr val="000000"/>
                   </a:solidFill>
@@ -4611,7 +4611,7 @@
             </a:ln>
             <a:extLst>
               <a:ext uri="{91240B29-F687-4f45-9708-019B960494DF}">
-                <a14:hiddenLine xmlns:a14="http://schemas.microsoft.com/office/drawing/2010/main" xmlns="" w="9525">
+                <a14:hiddenLine xmlns="" xmlns:a14="http://schemas.microsoft.com/office/drawing/2010/main" w="9525">
                   <a:solidFill>
                     <a:srgbClr val="000000"/>
                   </a:solidFill>
@@ -4701,7 +4701,7 @@
             </a:ln>
             <a:extLst>
               <a:ext uri="{91240B29-F687-4f45-9708-019B960494DF}">
-                <a14:hiddenLine xmlns:a14="http://schemas.microsoft.com/office/drawing/2010/main" xmlns="" w="9525">
+                <a14:hiddenLine xmlns="" xmlns:a14="http://schemas.microsoft.com/office/drawing/2010/main" w="9525">
                   <a:solidFill>
                     <a:srgbClr val="000000"/>
                   </a:solidFill>
@@ -4841,7 +4841,7 @@
           <a:p>
             <a:fld id="{02CD26A6-15A2-B449-9218-85BDE57EBA42}" type="datetime1">
               <a:rPr lang="en-US" smtClean="0"/>
-              <a:t>8/27/25</a:t>
+              <a:t>10/7/25</a:t>
             </a:fld>
             <a:endParaRPr lang="en-US"/>
           </a:p>
@@ -5108,7 +5108,7 @@
           <a:p>
             <a:fld id="{86196231-FA13-E844-B7A9-39406EF14982}" type="datetime1">
               <a:rPr lang="en-US" smtClean="0"/>
-              <a:t>8/27/25</a:t>
+              <a:t>10/7/25</a:t>
             </a:fld>
             <a:endParaRPr lang="en-US"/>
           </a:p>
@@ -5304,7 +5304,7 @@
           <a:p>
             <a:fld id="{F8A175EF-9ECA-B54E-B5F1-E9A7ECD1A9A7}" type="datetime1">
               <a:rPr lang="en-US" smtClean="0"/>
-              <a:t>8/27/25</a:t>
+              <a:t>10/7/25</a:t>
             </a:fld>
             <a:endParaRPr lang="en-US"/>
           </a:p>
@@ -5567,7 +5567,7 @@
           <a:p>
             <a:fld id="{500354CC-C6D3-2343-B23F-7899CBC1D23F}" type="datetime1">
               <a:rPr lang="en-US" smtClean="0"/>
-              <a:t>8/27/25</a:t>
+              <a:t>10/7/25</a:t>
             </a:fld>
             <a:endParaRPr lang="en-US"/>
           </a:p>
@@ -6001,7 +6001,7 @@
           <a:p>
             <a:fld id="{91A73A3F-0738-3A4B-9460-155F524D47D2}" type="datetime1">
               <a:rPr lang="en-US" smtClean="0"/>
-              <a:t>8/27/25</a:t>
+              <a:t>10/7/25</a:t>
             </a:fld>
             <a:endParaRPr lang="en-US"/>
           </a:p>
@@ -6547,7 +6547,7 @@
           <a:p>
             <a:fld id="{7377266C-1F81-3F4F-9E28-AFBFE5E15350}" type="datetime1">
               <a:rPr lang="en-US" smtClean="0"/>
-              <a:t>8/27/25</a:t>
+              <a:t>10/7/25</a:t>
             </a:fld>
             <a:endParaRPr lang="en-US"/>
           </a:p>
@@ -7267,7 +7267,7 @@
           <a:p>
             <a:fld id="{9025C51A-5B64-744E-84CD-F53E0FA92537}" type="datetime1">
               <a:rPr lang="en-US" smtClean="0"/>
-              <a:t>8/27/25</a:t>
+              <a:t>10/7/25</a:t>
             </a:fld>
             <a:endParaRPr lang="en-US"/>
           </a:p>
@@ -7437,7 +7437,7 @@
           <a:p>
             <a:fld id="{4DCA85F3-FE26-6F4E-A395-CAB36C7DE96B}" type="datetime1">
               <a:rPr lang="en-US" smtClean="0"/>
-              <a:t>8/27/25</a:t>
+              <a:t>10/7/25</a:t>
             </a:fld>
             <a:endParaRPr lang="en-US"/>
           </a:p>
@@ -7617,7 +7617,7 @@
           <a:p>
             <a:fld id="{93668D8C-2310-1F49-8704-ED0A872C1D76}" type="datetime1">
               <a:rPr lang="en-US" smtClean="0"/>
-              <a:t>8/27/25</a:t>
+              <a:t>10/7/25</a:t>
             </a:fld>
             <a:endParaRPr lang="en-US"/>
           </a:p>
@@ -7787,7 +7787,7 @@
           <a:p>
             <a:fld id="{1AE8176D-7614-0047-BF7D-0D7213955B60}" type="datetime1">
               <a:rPr lang="en-US" smtClean="0"/>
-              <a:t>8/27/25</a:t>
+              <a:t>10/7/25</a:t>
             </a:fld>
             <a:endParaRPr lang="en-US"/>
           </a:p>
@@ -8037,7 +8037,7 @@
           <a:p>
             <a:fld id="{BBD3DFC6-3AF6-5F40-9115-61971812DEC9}" type="datetime1">
               <a:rPr lang="en-US" smtClean="0"/>
-              <a:t>8/27/25</a:t>
+              <a:t>10/7/25</a:t>
             </a:fld>
             <a:endParaRPr lang="en-US"/>
           </a:p>
@@ -8269,7 +8269,7 @@
           <a:p>
             <a:fld id="{B9ED4E90-35C8-E14C-B1F1-9C55AFA0B23D}" type="datetime1">
               <a:rPr lang="en-US" smtClean="0"/>
-              <a:t>8/27/25</a:t>
+              <a:t>10/7/25</a:t>
             </a:fld>
             <a:endParaRPr lang="en-US"/>
           </a:p>
@@ -8655,7 +8655,7 @@
           <a:p>
             <a:fld id="{E46EEFC5-06EE-864E-8985-D4A3572367C6}" type="datetime1">
               <a:rPr lang="en-US" smtClean="0"/>
-              <a:t>8/27/25</a:t>
+              <a:t>10/7/25</a:t>
             </a:fld>
             <a:endParaRPr lang="en-US"/>
           </a:p>
@@ -8778,7 +8778,7 @@
           <a:p>
             <a:fld id="{8AFAEA8D-371E-E449-A3CD-D4BC4ACAE00B}" type="datetime1">
               <a:rPr lang="en-US" smtClean="0"/>
-              <a:t>8/27/25</a:t>
+              <a:t>10/7/25</a:t>
             </a:fld>
             <a:endParaRPr lang="en-US"/>
           </a:p>
@@ -8873,7 +8873,7 @@
           <a:p>
             <a:fld id="{995DCDE8-2B30-9C4B-9524-B7B866851B77}" type="datetime1">
               <a:rPr lang="en-US" smtClean="0"/>
-              <a:t>8/27/25</a:t>
+              <a:t>10/7/25</a:t>
             </a:fld>
             <a:endParaRPr lang="en-US"/>
           </a:p>
@@ -9122,7 +9122,7 @@
           <a:p>
             <a:fld id="{29D79D64-9F73-834A-BB33-5400411F3A00}" type="datetime1">
               <a:rPr lang="en-US" smtClean="0"/>
-              <a:t>8/27/25</a:t>
+              <a:t>10/7/25</a:t>
             </a:fld>
             <a:endParaRPr lang="en-US"/>
           </a:p>
@@ -9407,7 +9407,7 @@
           <a:p>
             <a:fld id="{9A1452D3-087A-BD44-B9C8-6816C7755A34}" type="datetime1">
               <a:rPr lang="en-US" smtClean="0"/>
-              <a:t>8/27/25</a:t>
+              <a:t>10/7/25</a:t>
             </a:fld>
             <a:endParaRPr lang="en-US"/>
           </a:p>
@@ -9530,7 +9530,7 @@
           <a:noFill/>
           <a:extLst>
             <a:ext uri="{909E8E84-426E-40dd-AFC4-6F175D3DCCD1}">
-              <a14:hiddenFill xmlns:a14="http://schemas.microsoft.com/office/drawing/2010/main" xmlns="">
+              <a14:hiddenFill xmlns="" xmlns:a14="http://schemas.microsoft.com/office/drawing/2010/main">
                 <a:solidFill>
                   <a:srgbClr val="FFFFFF"/>
                 </a:solidFill>
@@ -9604,7 +9604,7 @@
               </a:ln>
               <a:extLst>
                 <a:ext uri="{91240B29-F687-4f45-9708-019B960494DF}">
-                  <a14:hiddenLine xmlns:a14="http://schemas.microsoft.com/office/drawing/2010/main" xmlns="" w="9525">
+                  <a14:hiddenLine xmlns="" xmlns:a14="http://schemas.microsoft.com/office/drawing/2010/main" w="9525">
                     <a:solidFill>
                       <a:srgbClr val="000000"/>
                     </a:solidFill>
@@ -9694,7 +9694,7 @@
               </a:ln>
               <a:extLst>
                 <a:ext uri="{91240B29-F687-4f45-9708-019B960494DF}">
-                  <a14:hiddenLine xmlns:a14="http://schemas.microsoft.com/office/drawing/2010/main" xmlns="" w="9525">
+                  <a14:hiddenLine xmlns="" xmlns:a14="http://schemas.microsoft.com/office/drawing/2010/main" w="9525">
                     <a:solidFill>
                       <a:srgbClr val="000000"/>
                     </a:solidFill>
@@ -9784,7 +9784,7 @@
               </a:ln>
               <a:extLst>
                 <a:ext uri="{91240B29-F687-4f45-9708-019B960494DF}">
-                  <a14:hiddenLine xmlns:a14="http://schemas.microsoft.com/office/drawing/2010/main" xmlns="" w="9525">
+                  <a14:hiddenLine xmlns="" xmlns:a14="http://schemas.microsoft.com/office/drawing/2010/main" w="9525">
                     <a:solidFill>
                       <a:srgbClr val="000000"/>
                     </a:solidFill>
@@ -9846,7 +9846,7 @@
               </a:ln>
               <a:extLst>
                 <a:ext uri="{91240B29-F687-4f45-9708-019B960494DF}">
-                  <a14:hiddenLine xmlns:a14="http://schemas.microsoft.com/office/drawing/2010/main" xmlns="" w="9525">
+                  <a14:hiddenLine xmlns="" xmlns:a14="http://schemas.microsoft.com/office/drawing/2010/main" w="9525">
                     <a:solidFill>
                       <a:srgbClr val="000000"/>
                     </a:solidFill>
@@ -9936,7 +9936,7 @@
               </a:ln>
               <a:extLst>
                 <a:ext uri="{91240B29-F687-4f45-9708-019B960494DF}">
-                  <a14:hiddenLine xmlns:a14="http://schemas.microsoft.com/office/drawing/2010/main" xmlns="" w="9525">
+                  <a14:hiddenLine xmlns="" xmlns:a14="http://schemas.microsoft.com/office/drawing/2010/main" w="9525">
                     <a:solidFill>
                       <a:srgbClr val="000000"/>
                     </a:solidFill>
@@ -9998,7 +9998,7 @@
               </a:ln>
               <a:extLst>
                 <a:ext uri="{91240B29-F687-4f45-9708-019B960494DF}">
-                  <a14:hiddenLine xmlns:a14="http://schemas.microsoft.com/office/drawing/2010/main" xmlns="" w="9525">
+                  <a14:hiddenLine xmlns="" xmlns:a14="http://schemas.microsoft.com/office/drawing/2010/main" w="9525">
                     <a:solidFill>
                       <a:srgbClr val="000000"/>
                     </a:solidFill>
@@ -10060,7 +10060,7 @@
               </a:ln>
               <a:extLst>
                 <a:ext uri="{91240B29-F687-4f45-9708-019B960494DF}">
-                  <a14:hiddenLine xmlns:a14="http://schemas.microsoft.com/office/drawing/2010/main" xmlns="" w="9525">
+                  <a14:hiddenLine xmlns="" xmlns:a14="http://schemas.microsoft.com/office/drawing/2010/main" w="9525">
                     <a:solidFill>
                       <a:srgbClr val="000000"/>
                     </a:solidFill>
@@ -10150,7 +10150,7 @@
               </a:ln>
               <a:extLst>
                 <a:ext uri="{91240B29-F687-4f45-9708-019B960494DF}">
-                  <a14:hiddenLine xmlns:a14="http://schemas.microsoft.com/office/drawing/2010/main" xmlns="" w="9525">
+                  <a14:hiddenLine xmlns="" xmlns:a14="http://schemas.microsoft.com/office/drawing/2010/main" w="9525">
                     <a:solidFill>
                       <a:srgbClr val="000000"/>
                     </a:solidFill>
@@ -10240,7 +10240,7 @@
               </a:ln>
               <a:extLst>
                 <a:ext uri="{91240B29-F687-4f45-9708-019B960494DF}">
-                  <a14:hiddenLine xmlns:a14="http://schemas.microsoft.com/office/drawing/2010/main" xmlns="" w="9525">
+                  <a14:hiddenLine xmlns="" xmlns:a14="http://schemas.microsoft.com/office/drawing/2010/main" w="9525">
                     <a:solidFill>
                       <a:srgbClr val="000000"/>
                     </a:solidFill>
@@ -10302,7 +10302,7 @@
               </a:ln>
               <a:extLst>
                 <a:ext uri="{91240B29-F687-4f45-9708-019B960494DF}">
-                  <a14:hiddenLine xmlns:a14="http://schemas.microsoft.com/office/drawing/2010/main" xmlns="" w="9525">
+                  <a14:hiddenLine xmlns="" xmlns:a14="http://schemas.microsoft.com/office/drawing/2010/main" w="9525">
                     <a:solidFill>
                       <a:srgbClr val="000000"/>
                     </a:solidFill>
@@ -10412,7 +10412,7 @@
               </a:ln>
               <a:extLst>
                 <a:ext uri="{91240B29-F687-4f45-9708-019B960494DF}">
-                  <a14:hiddenLine xmlns:a14="http://schemas.microsoft.com/office/drawing/2010/main" xmlns="" w="9525">
+                  <a14:hiddenLine xmlns="" xmlns:a14="http://schemas.microsoft.com/office/drawing/2010/main" w="9525">
                     <a:solidFill>
                       <a:srgbClr val="000000"/>
                     </a:solidFill>
@@ -10496,7 +10496,7 @@
               </a:ln>
               <a:extLst>
                 <a:ext uri="{91240B29-F687-4f45-9708-019B960494DF}">
-                  <a14:hiddenLine xmlns:a14="http://schemas.microsoft.com/office/drawing/2010/main" xmlns="" w="9525">
+                  <a14:hiddenLine xmlns="" xmlns:a14="http://schemas.microsoft.com/office/drawing/2010/main" w="9525">
                     <a:solidFill>
                       <a:srgbClr val="000000"/>
                     </a:solidFill>
@@ -10558,7 +10558,7 @@
               </a:ln>
               <a:extLst>
                 <a:ext uri="{91240B29-F687-4f45-9708-019B960494DF}">
-                  <a14:hiddenLine xmlns:a14="http://schemas.microsoft.com/office/drawing/2010/main" xmlns="" w="9525">
+                  <a14:hiddenLine xmlns="" xmlns:a14="http://schemas.microsoft.com/office/drawing/2010/main" w="9525">
                     <a:solidFill>
                       <a:srgbClr val="000000"/>
                     </a:solidFill>
@@ -10620,7 +10620,7 @@
               </a:ln>
               <a:extLst>
                 <a:ext uri="{91240B29-F687-4f45-9708-019B960494DF}">
-                  <a14:hiddenLine xmlns:a14="http://schemas.microsoft.com/office/drawing/2010/main" xmlns="" w="9525">
+                  <a14:hiddenLine xmlns="" xmlns:a14="http://schemas.microsoft.com/office/drawing/2010/main" w="9525">
                     <a:solidFill>
                       <a:srgbClr val="000000"/>
                     </a:solidFill>
@@ -10710,7 +10710,7 @@
               </a:ln>
               <a:extLst>
                 <a:ext uri="{91240B29-F687-4f45-9708-019B960494DF}">
-                  <a14:hiddenLine xmlns:a14="http://schemas.microsoft.com/office/drawing/2010/main" xmlns="" w="9525">
+                  <a14:hiddenLine xmlns="" xmlns:a14="http://schemas.microsoft.com/office/drawing/2010/main" w="9525">
                     <a:solidFill>
                       <a:srgbClr val="000000"/>
                     </a:solidFill>
@@ -10744,7 +10744,7 @@
               </a:ln>
               <a:extLst>
                 <a:ext uri="{91240B29-F687-4f45-9708-019B960494DF}">
-                  <a14:hiddenLine xmlns:a14="http://schemas.microsoft.com/office/drawing/2010/main" xmlns="" w="9525">
+                  <a14:hiddenLine xmlns="" xmlns:a14="http://schemas.microsoft.com/office/drawing/2010/main" w="9525">
                     <a:solidFill>
                       <a:srgbClr val="000000"/>
                     </a:solidFill>
@@ -10809,7 +10809,7 @@
               </a:ln>
               <a:extLst>
                 <a:ext uri="{91240B29-F687-4f45-9708-019B960494DF}">
-                  <a14:hiddenLine xmlns:a14="http://schemas.microsoft.com/office/drawing/2010/main" xmlns="" w="9525">
+                  <a14:hiddenLine xmlns="" xmlns:a14="http://schemas.microsoft.com/office/drawing/2010/main" w="9525">
                     <a:solidFill>
                       <a:srgbClr val="000000"/>
                     </a:solidFill>
@@ -10899,7 +10899,7 @@
               </a:ln>
               <a:extLst>
                 <a:ext uri="{91240B29-F687-4f45-9708-019B960494DF}">
-                  <a14:hiddenLine xmlns:a14="http://schemas.microsoft.com/office/drawing/2010/main" xmlns="" w="9525">
+                  <a14:hiddenLine xmlns="" xmlns:a14="http://schemas.microsoft.com/office/drawing/2010/main" w="9525">
                     <a:solidFill>
                       <a:srgbClr val="000000"/>
                     </a:solidFill>
@@ -10961,7 +10961,7 @@
               </a:ln>
               <a:extLst>
                 <a:ext uri="{91240B29-F687-4f45-9708-019B960494DF}">
-                  <a14:hiddenLine xmlns:a14="http://schemas.microsoft.com/office/drawing/2010/main" xmlns="" w="9525">
+                  <a14:hiddenLine xmlns="" xmlns:a14="http://schemas.microsoft.com/office/drawing/2010/main" w="9525">
                     <a:solidFill>
                       <a:srgbClr val="000000"/>
                     </a:solidFill>
@@ -11051,7 +11051,7 @@
               </a:ln>
               <a:extLst>
                 <a:ext uri="{91240B29-F687-4f45-9708-019B960494DF}">
-                  <a14:hiddenLine xmlns:a14="http://schemas.microsoft.com/office/drawing/2010/main" xmlns="" w="9525">
+                  <a14:hiddenLine xmlns="" xmlns:a14="http://schemas.microsoft.com/office/drawing/2010/main" w="9525">
                     <a:solidFill>
                       <a:srgbClr val="000000"/>
                     </a:solidFill>
@@ -11116,7 +11116,7 @@
               </a:ln>
               <a:extLst>
                 <a:ext uri="{91240B29-F687-4f45-9708-019B960494DF}">
-                  <a14:hiddenLine xmlns:a14="http://schemas.microsoft.com/office/drawing/2010/main" xmlns="" w="9525">
+                  <a14:hiddenLine xmlns="" xmlns:a14="http://schemas.microsoft.com/office/drawing/2010/main" w="9525">
                     <a:solidFill>
                       <a:srgbClr val="000000"/>
                     </a:solidFill>
@@ -11178,7 +11178,7 @@
               </a:ln>
               <a:extLst>
                 <a:ext uri="{91240B29-F687-4f45-9708-019B960494DF}">
-                  <a14:hiddenLine xmlns:a14="http://schemas.microsoft.com/office/drawing/2010/main" xmlns="" w="9525">
+                  <a14:hiddenLine xmlns="" xmlns:a14="http://schemas.microsoft.com/office/drawing/2010/main" w="9525">
                     <a:solidFill>
                       <a:srgbClr val="000000"/>
                     </a:solidFill>
@@ -11268,7 +11268,7 @@
               </a:ln>
               <a:extLst>
                 <a:ext uri="{91240B29-F687-4f45-9708-019B960494DF}">
-                  <a14:hiddenLine xmlns:a14="http://schemas.microsoft.com/office/drawing/2010/main" xmlns="" w="9525">
+                  <a14:hiddenLine xmlns="" xmlns:a14="http://schemas.microsoft.com/office/drawing/2010/main" w="9525">
                     <a:solidFill>
                       <a:srgbClr val="000000"/>
                     </a:solidFill>
@@ -11358,7 +11358,7 @@
               </a:ln>
               <a:extLst>
                 <a:ext uri="{91240B29-F687-4f45-9708-019B960494DF}">
-                  <a14:hiddenLine xmlns:a14="http://schemas.microsoft.com/office/drawing/2010/main" xmlns="" w="9525">
+                  <a14:hiddenLine xmlns="" xmlns:a14="http://schemas.microsoft.com/office/drawing/2010/main" w="9525">
                     <a:solidFill>
                       <a:srgbClr val="000000"/>
                     </a:solidFill>
@@ -11423,7 +11423,7 @@
               </a:ln>
               <a:extLst>
                 <a:ext uri="{91240B29-F687-4f45-9708-019B960494DF}">
-                  <a14:hiddenLine xmlns:a14="http://schemas.microsoft.com/office/drawing/2010/main" xmlns="" w="9525">
+                  <a14:hiddenLine xmlns="" xmlns:a14="http://schemas.microsoft.com/office/drawing/2010/main" w="9525">
                     <a:solidFill>
                       <a:srgbClr val="000000"/>
                     </a:solidFill>
@@ -11543,7 +11543,7 @@
               </a:ln>
               <a:extLst>
                 <a:ext uri="{91240B29-F687-4f45-9708-019B960494DF}">
-                  <a14:hiddenLine xmlns:a14="http://schemas.microsoft.com/office/drawing/2010/main" xmlns="" w="9525">
+                  <a14:hiddenLine xmlns="" xmlns:a14="http://schemas.microsoft.com/office/drawing/2010/main" w="9525">
                     <a:solidFill>
                       <a:srgbClr val="000000"/>
                     </a:solidFill>
@@ -11624,7 +11624,7 @@
               </a:ln>
               <a:extLst>
                 <a:ext uri="{91240B29-F687-4f45-9708-019B960494DF}">
-                  <a14:hiddenLine xmlns:a14="http://schemas.microsoft.com/office/drawing/2010/main" xmlns="" w="9525">
+                  <a14:hiddenLine xmlns="" xmlns:a14="http://schemas.microsoft.com/office/drawing/2010/main" w="9525">
                     <a:solidFill>
                       <a:srgbClr val="000000"/>
                     </a:solidFill>
@@ -11739,7 +11739,7 @@
               </a:ln>
               <a:extLst>
                 <a:ext uri="{91240B29-F687-4f45-9708-019B960494DF}">
-                  <a14:hiddenLine xmlns:a14="http://schemas.microsoft.com/office/drawing/2010/main" xmlns="" w="9525">
+                  <a14:hiddenLine xmlns="" xmlns:a14="http://schemas.microsoft.com/office/drawing/2010/main" w="9525">
                     <a:solidFill>
                       <a:srgbClr val="000000"/>
                     </a:solidFill>
@@ -11829,7 +11829,7 @@
               </a:ln>
               <a:extLst>
                 <a:ext uri="{91240B29-F687-4f45-9708-019B960494DF}">
-                  <a14:hiddenLine xmlns:a14="http://schemas.microsoft.com/office/drawing/2010/main" xmlns="" w="9525">
+                  <a14:hiddenLine xmlns="" xmlns:a14="http://schemas.microsoft.com/office/drawing/2010/main" w="9525">
                     <a:solidFill>
                       <a:srgbClr val="000000"/>
                     </a:solidFill>
@@ -11894,7 +11894,7 @@
               </a:ln>
               <a:extLst>
                 <a:ext uri="{91240B29-F687-4f45-9708-019B960494DF}">
-                  <a14:hiddenLine xmlns:a14="http://schemas.microsoft.com/office/drawing/2010/main" xmlns="" w="9525">
+                  <a14:hiddenLine xmlns="" xmlns:a14="http://schemas.microsoft.com/office/drawing/2010/main" w="9525">
                     <a:solidFill>
                       <a:srgbClr val="000000"/>
                     </a:solidFill>
@@ -11984,7 +11984,7 @@
               </a:ln>
               <a:extLst>
                 <a:ext uri="{91240B29-F687-4f45-9708-019B960494DF}">
-                  <a14:hiddenLine xmlns:a14="http://schemas.microsoft.com/office/drawing/2010/main" xmlns="" w="9525">
+                  <a14:hiddenLine xmlns="" xmlns:a14="http://schemas.microsoft.com/office/drawing/2010/main" w="9525">
                     <a:solidFill>
                       <a:srgbClr val="000000"/>
                     </a:solidFill>
@@ -12052,7 +12052,7 @@
               </a:ln>
               <a:extLst>
                 <a:ext uri="{91240B29-F687-4f45-9708-019B960494DF}">
-                  <a14:hiddenLine xmlns:a14="http://schemas.microsoft.com/office/drawing/2010/main" xmlns="" w="9525">
+                  <a14:hiddenLine xmlns="" xmlns:a14="http://schemas.microsoft.com/office/drawing/2010/main" w="9525">
                     <a:solidFill>
                       <a:srgbClr val="000000"/>
                     </a:solidFill>
@@ -12142,7 +12142,7 @@
               </a:ln>
               <a:extLst>
                 <a:ext uri="{91240B29-F687-4f45-9708-019B960494DF}">
-                  <a14:hiddenLine xmlns:a14="http://schemas.microsoft.com/office/drawing/2010/main" xmlns="" w="9525">
+                  <a14:hiddenLine xmlns="" xmlns:a14="http://schemas.microsoft.com/office/drawing/2010/main" w="9525">
                     <a:solidFill>
                       <a:srgbClr val="000000"/>
                     </a:solidFill>
@@ -12210,7 +12210,7 @@
               </a:ln>
               <a:extLst>
                 <a:ext uri="{91240B29-F687-4f45-9708-019B960494DF}">
-                  <a14:hiddenLine xmlns:a14="http://schemas.microsoft.com/office/drawing/2010/main" xmlns="" w="9525">
+                  <a14:hiddenLine xmlns="" xmlns:a14="http://schemas.microsoft.com/office/drawing/2010/main" w="9525">
                     <a:solidFill>
                       <a:srgbClr val="000000"/>
                     </a:solidFill>
@@ -12300,7 +12300,7 @@
               </a:ln>
               <a:extLst>
                 <a:ext uri="{91240B29-F687-4f45-9708-019B960494DF}">
-                  <a14:hiddenLine xmlns:a14="http://schemas.microsoft.com/office/drawing/2010/main" xmlns="" w="9525">
+                  <a14:hiddenLine xmlns="" xmlns:a14="http://schemas.microsoft.com/office/drawing/2010/main" w="9525">
                     <a:solidFill>
                       <a:srgbClr val="000000"/>
                     </a:solidFill>
@@ -12334,7 +12334,7 @@
               </a:ln>
               <a:extLst>
                 <a:ext uri="{91240B29-F687-4f45-9708-019B960494DF}">
-                  <a14:hiddenLine xmlns:a14="http://schemas.microsoft.com/office/drawing/2010/main" xmlns="" w="9525">
+                  <a14:hiddenLine xmlns="" xmlns:a14="http://schemas.microsoft.com/office/drawing/2010/main" w="9525">
                     <a:solidFill>
                       <a:srgbClr val="000000"/>
                     </a:solidFill>
@@ -12474,7 +12474,7 @@
           <a:p>
             <a:fld id="{62DA8015-F4DF-264C-B6A2-A0129953FA2D}" type="datetime1">
               <a:rPr lang="en-US" smtClean="0"/>
-              <a:t>8/27/25</a:t>
+              <a:t>10/7/25</a:t>
             </a:fld>
             <a:endParaRPr lang="en-US"/>
           </a:p>
@@ -14453,8 +14453,8 @@
           </a:fontRef>
         </p:style>
       </p:cxnSp>
-      <mc:AlternateContent xmlns:mc="http://schemas.openxmlformats.org/markup-compatibility/2006">
-        <mc:Choice xmlns:a14="http://schemas.microsoft.com/office/drawing/2010/main" Requires="a14">
+      <mc:AlternateContent xmlns:mc="http://schemas.openxmlformats.org/markup-compatibility/2006" xmlns:a14="http://schemas.microsoft.com/office/drawing/2010/main">
+        <mc:Choice Requires="a14">
           <p:sp>
             <p:nvSpPr>
               <p:cNvPr id="12" name="TextBox 11">
@@ -14550,7 +14550,7 @@
             </p:txBody>
           </p:sp>
         </mc:Choice>
-        <mc:Fallback>
+        <mc:Fallback xmlns="">
           <p:sp>
             <p:nvSpPr>
               <p:cNvPr id="12" name="TextBox 11">
@@ -15780,8 +15780,8 @@
           </a:p>
         </p:txBody>
       </p:sp>
-      <mc:AlternateContent xmlns:mc="http://schemas.openxmlformats.org/markup-compatibility/2006">
-        <mc:Choice xmlns:a14="http://schemas.microsoft.com/office/drawing/2010/main" Requires="a14">
+      <mc:AlternateContent xmlns:mc="http://schemas.openxmlformats.org/markup-compatibility/2006" xmlns:a14="http://schemas.microsoft.com/office/drawing/2010/main">
+        <mc:Choice Requires="a14">
           <p:sp>
             <p:nvSpPr>
               <p:cNvPr id="3" name="Content Placeholder 2"/>
@@ -16449,7 +16449,7 @@
             </p:txBody>
           </p:sp>
         </mc:Choice>
-        <mc:Fallback>
+        <mc:Fallback xmlns="">
           <p:sp>
             <p:nvSpPr>
               <p:cNvPr id="3" name="Content Placeholder 2"/>
@@ -16670,8 +16670,8 @@
             </a:p>
           </p:txBody>
         </p:sp>
-        <mc:AlternateContent xmlns:mc="http://schemas.openxmlformats.org/markup-compatibility/2006">
-          <mc:Choice xmlns:a14="http://schemas.microsoft.com/office/drawing/2010/main" Requires="a14">
+        <mc:AlternateContent xmlns:mc="http://schemas.openxmlformats.org/markup-compatibility/2006" xmlns:a14="http://schemas.microsoft.com/office/drawing/2010/main">
+          <mc:Choice Requires="a14">
             <p:sp>
               <p:nvSpPr>
                 <p:cNvPr id="25" name="Rectangle 24">
@@ -16774,7 +16774,7 @@
               </p:txBody>
             </p:sp>
           </mc:Choice>
-          <mc:Fallback>
+          <mc:Fallback xmlns="">
             <p:sp>
               <p:nvSpPr>
                 <p:cNvPr id="25" name="Rectangle 24">
@@ -16824,8 +16824,8 @@
             </p:sp>
           </mc:Fallback>
         </mc:AlternateContent>
-        <mc:AlternateContent xmlns:mc="http://schemas.openxmlformats.org/markup-compatibility/2006">
-          <mc:Choice xmlns:a14="http://schemas.microsoft.com/office/drawing/2010/main" Requires="a14">
+        <mc:AlternateContent xmlns:mc="http://schemas.openxmlformats.org/markup-compatibility/2006" xmlns:a14="http://schemas.microsoft.com/office/drawing/2010/main">
+          <mc:Choice Requires="a14">
             <p:sp>
               <p:nvSpPr>
                 <p:cNvPr id="26" name="Rectangle 25">
@@ -16928,7 +16928,7 @@
               </p:txBody>
             </p:sp>
           </mc:Choice>
-          <mc:Fallback>
+          <mc:Fallback xmlns="">
             <p:sp>
               <p:nvSpPr>
                 <p:cNvPr id="26" name="Rectangle 25">
@@ -16978,8 +16978,8 @@
             </p:sp>
           </mc:Fallback>
         </mc:AlternateContent>
-        <mc:AlternateContent xmlns:mc="http://schemas.openxmlformats.org/markup-compatibility/2006">
-          <mc:Choice xmlns:a14="http://schemas.microsoft.com/office/drawing/2010/main" Requires="a14">
+        <mc:AlternateContent xmlns:mc="http://schemas.openxmlformats.org/markup-compatibility/2006" xmlns:a14="http://schemas.microsoft.com/office/drawing/2010/main">
+          <mc:Choice Requires="a14">
             <p:sp>
               <p:nvSpPr>
                 <p:cNvPr id="29" name="Rectangle 28">
@@ -17082,7 +17082,7 @@
               </p:txBody>
             </p:sp>
           </mc:Choice>
-          <mc:Fallback>
+          <mc:Fallback xmlns="">
             <p:sp>
               <p:nvSpPr>
                 <p:cNvPr id="29" name="Rectangle 28">
@@ -17132,8 +17132,8 @@
             </p:sp>
           </mc:Fallback>
         </mc:AlternateContent>
-        <mc:AlternateContent xmlns:mc="http://schemas.openxmlformats.org/markup-compatibility/2006">
-          <mc:Choice xmlns:a14="http://schemas.microsoft.com/office/drawing/2010/main" Requires="a14">
+        <mc:AlternateContent xmlns:mc="http://schemas.openxmlformats.org/markup-compatibility/2006" xmlns:a14="http://schemas.microsoft.com/office/drawing/2010/main">
+          <mc:Choice Requires="a14">
             <p:sp>
               <p:nvSpPr>
                 <p:cNvPr id="30" name="Rectangle 29">
@@ -17236,7 +17236,7 @@
               </p:txBody>
             </p:sp>
           </mc:Choice>
-          <mc:Fallback>
+          <mc:Fallback xmlns="">
             <p:sp>
               <p:nvSpPr>
                 <p:cNvPr id="30" name="Rectangle 29">
@@ -17366,8 +17366,8 @@
             </a:p>
           </p:txBody>
         </p:sp>
-        <mc:AlternateContent xmlns:mc="http://schemas.openxmlformats.org/markup-compatibility/2006">
-          <mc:Choice xmlns:a14="http://schemas.microsoft.com/office/drawing/2010/main" Requires="a14">
+        <mc:AlternateContent xmlns:mc="http://schemas.openxmlformats.org/markup-compatibility/2006" xmlns:a14="http://schemas.microsoft.com/office/drawing/2010/main">
+          <mc:Choice Requires="a14">
             <p:sp>
               <p:nvSpPr>
                 <p:cNvPr id="4" name="Rectangle 3">
@@ -17470,7 +17470,7 @@
               </p:txBody>
             </p:sp>
           </mc:Choice>
-          <mc:Fallback>
+          <mc:Fallback xmlns="">
             <p:sp>
               <p:nvSpPr>
                 <p:cNvPr id="4" name="Rectangle 3">
@@ -17520,8 +17520,8 @@
             </p:sp>
           </mc:Fallback>
         </mc:AlternateContent>
-        <mc:AlternateContent xmlns:mc="http://schemas.openxmlformats.org/markup-compatibility/2006">
-          <mc:Choice xmlns:a14="http://schemas.microsoft.com/office/drawing/2010/main" Requires="a14">
+        <mc:AlternateContent xmlns:mc="http://schemas.openxmlformats.org/markup-compatibility/2006" xmlns:a14="http://schemas.microsoft.com/office/drawing/2010/main">
+          <mc:Choice Requires="a14">
             <p:sp>
               <p:nvSpPr>
                 <p:cNvPr id="6" name="Rectangle 5">
@@ -17624,7 +17624,7 @@
               </p:txBody>
             </p:sp>
           </mc:Choice>
-          <mc:Fallback>
+          <mc:Fallback xmlns="">
             <p:sp>
               <p:nvSpPr>
                 <p:cNvPr id="6" name="Rectangle 5">
@@ -17674,8 +17674,8 @@
             </p:sp>
           </mc:Fallback>
         </mc:AlternateContent>
-        <mc:AlternateContent xmlns:mc="http://schemas.openxmlformats.org/markup-compatibility/2006">
-          <mc:Choice xmlns:a14="http://schemas.microsoft.com/office/drawing/2010/main" Requires="a14">
+        <mc:AlternateContent xmlns:mc="http://schemas.openxmlformats.org/markup-compatibility/2006" xmlns:a14="http://schemas.microsoft.com/office/drawing/2010/main">
+          <mc:Choice Requires="a14">
             <p:sp>
               <p:nvSpPr>
                 <p:cNvPr id="8" name="Rectangle 7">
@@ -17778,7 +17778,7 @@
               </p:txBody>
             </p:sp>
           </mc:Choice>
-          <mc:Fallback>
+          <mc:Fallback xmlns="">
             <p:sp>
               <p:nvSpPr>
                 <p:cNvPr id="8" name="Rectangle 7">
@@ -17828,8 +17828,8 @@
             </p:sp>
           </mc:Fallback>
         </mc:AlternateContent>
-        <mc:AlternateContent xmlns:mc="http://schemas.openxmlformats.org/markup-compatibility/2006">
-          <mc:Choice xmlns:a14="http://schemas.microsoft.com/office/drawing/2010/main" Requires="a14">
+        <mc:AlternateContent xmlns:mc="http://schemas.openxmlformats.org/markup-compatibility/2006" xmlns:a14="http://schemas.microsoft.com/office/drawing/2010/main">
+          <mc:Choice Requires="a14">
             <p:sp>
               <p:nvSpPr>
                 <p:cNvPr id="9" name="Rectangle 8">
@@ -17932,7 +17932,7 @@
               </p:txBody>
             </p:sp>
           </mc:Choice>
-          <mc:Fallback>
+          <mc:Fallback xmlns="">
             <p:sp>
               <p:nvSpPr>
                 <p:cNvPr id="9" name="Rectangle 8">
@@ -18094,8 +18094,8 @@
             </a:p>
           </p:txBody>
         </p:sp>
-        <mc:AlternateContent xmlns:mc="http://schemas.openxmlformats.org/markup-compatibility/2006">
-          <mc:Choice xmlns:a14="http://schemas.microsoft.com/office/drawing/2010/main" Requires="a14">
+        <mc:AlternateContent xmlns:mc="http://schemas.openxmlformats.org/markup-compatibility/2006" xmlns:a14="http://schemas.microsoft.com/office/drawing/2010/main">
+          <mc:Choice Requires="a14">
             <p:sp>
               <p:nvSpPr>
                 <p:cNvPr id="15" name="Rectangle 14">
@@ -18198,7 +18198,7 @@
               </p:txBody>
             </p:sp>
           </mc:Choice>
-          <mc:Fallback>
+          <mc:Fallback xmlns="">
             <p:sp>
               <p:nvSpPr>
                 <p:cNvPr id="15" name="Rectangle 14">
@@ -18248,8 +18248,8 @@
             </p:sp>
           </mc:Fallback>
         </mc:AlternateContent>
-        <mc:AlternateContent xmlns:mc="http://schemas.openxmlformats.org/markup-compatibility/2006">
-          <mc:Choice xmlns:a14="http://schemas.microsoft.com/office/drawing/2010/main" Requires="a14">
+        <mc:AlternateContent xmlns:mc="http://schemas.openxmlformats.org/markup-compatibility/2006" xmlns:a14="http://schemas.microsoft.com/office/drawing/2010/main">
+          <mc:Choice Requires="a14">
             <p:sp>
               <p:nvSpPr>
                 <p:cNvPr id="16" name="Rectangle 15">
@@ -18352,7 +18352,7 @@
               </p:txBody>
             </p:sp>
           </mc:Choice>
-          <mc:Fallback>
+          <mc:Fallback xmlns="">
             <p:sp>
               <p:nvSpPr>
                 <p:cNvPr id="16" name="Rectangle 15">
@@ -18402,8 +18402,8 @@
             </p:sp>
           </mc:Fallback>
         </mc:AlternateContent>
-        <mc:AlternateContent xmlns:mc="http://schemas.openxmlformats.org/markup-compatibility/2006">
-          <mc:Choice xmlns:a14="http://schemas.microsoft.com/office/drawing/2010/main" Requires="a14">
+        <mc:AlternateContent xmlns:mc="http://schemas.openxmlformats.org/markup-compatibility/2006" xmlns:a14="http://schemas.microsoft.com/office/drawing/2010/main">
+          <mc:Choice Requires="a14">
             <p:sp>
               <p:nvSpPr>
                 <p:cNvPr id="17" name="Rectangle 16">
@@ -18506,7 +18506,7 @@
               </p:txBody>
             </p:sp>
           </mc:Choice>
-          <mc:Fallback>
+          <mc:Fallback xmlns="">
             <p:sp>
               <p:nvSpPr>
                 <p:cNvPr id="17" name="Rectangle 16">
@@ -18556,8 +18556,8 @@
             </p:sp>
           </mc:Fallback>
         </mc:AlternateContent>
-        <mc:AlternateContent xmlns:mc="http://schemas.openxmlformats.org/markup-compatibility/2006">
-          <mc:Choice xmlns:a14="http://schemas.microsoft.com/office/drawing/2010/main" Requires="a14">
+        <mc:AlternateContent xmlns:mc="http://schemas.openxmlformats.org/markup-compatibility/2006" xmlns:a14="http://schemas.microsoft.com/office/drawing/2010/main">
+          <mc:Choice Requires="a14">
             <p:sp>
               <p:nvSpPr>
                 <p:cNvPr id="18" name="Rectangle 17">
@@ -18660,7 +18660,7 @@
               </p:txBody>
             </p:sp>
           </mc:Choice>
-          <mc:Fallback>
+          <mc:Fallback xmlns="">
             <p:sp>
               <p:nvSpPr>
                 <p:cNvPr id="18" name="Rectangle 17">
@@ -18790,8 +18790,8 @@
             </a:p>
           </p:txBody>
         </p:sp>
-        <mc:AlternateContent xmlns:mc="http://schemas.openxmlformats.org/markup-compatibility/2006">
-          <mc:Choice xmlns:a14="http://schemas.microsoft.com/office/drawing/2010/main" Requires="a14">
+        <mc:AlternateContent xmlns:mc="http://schemas.openxmlformats.org/markup-compatibility/2006" xmlns:a14="http://schemas.microsoft.com/office/drawing/2010/main">
+          <mc:Choice Requires="a14">
             <p:sp>
               <p:nvSpPr>
                 <p:cNvPr id="21" name="Rectangle 20">
@@ -18894,7 +18894,7 @@
               </p:txBody>
             </p:sp>
           </mc:Choice>
-          <mc:Fallback>
+          <mc:Fallback xmlns="">
             <p:sp>
               <p:nvSpPr>
                 <p:cNvPr id="21" name="Rectangle 20">
@@ -18944,8 +18944,8 @@
             </p:sp>
           </mc:Fallback>
         </mc:AlternateContent>
-        <mc:AlternateContent xmlns:mc="http://schemas.openxmlformats.org/markup-compatibility/2006">
-          <mc:Choice xmlns:a14="http://schemas.microsoft.com/office/drawing/2010/main" Requires="a14">
+        <mc:AlternateContent xmlns:mc="http://schemas.openxmlformats.org/markup-compatibility/2006" xmlns:a14="http://schemas.microsoft.com/office/drawing/2010/main">
+          <mc:Choice Requires="a14">
             <p:sp>
               <p:nvSpPr>
                 <p:cNvPr id="22" name="Rectangle 21">
@@ -19048,7 +19048,7 @@
               </p:txBody>
             </p:sp>
           </mc:Choice>
-          <mc:Fallback>
+          <mc:Fallback xmlns="">
             <p:sp>
               <p:nvSpPr>
                 <p:cNvPr id="22" name="Rectangle 21">
@@ -19098,8 +19098,8 @@
             </p:sp>
           </mc:Fallback>
         </mc:AlternateContent>
-        <mc:AlternateContent xmlns:mc="http://schemas.openxmlformats.org/markup-compatibility/2006">
-          <mc:Choice xmlns:a14="http://schemas.microsoft.com/office/drawing/2010/main" Requires="a14">
+        <mc:AlternateContent xmlns:mc="http://schemas.openxmlformats.org/markup-compatibility/2006" xmlns:a14="http://schemas.microsoft.com/office/drawing/2010/main">
+          <mc:Choice Requires="a14">
             <p:sp>
               <p:nvSpPr>
                 <p:cNvPr id="23" name="Rectangle 22">
@@ -19202,7 +19202,7 @@
               </p:txBody>
             </p:sp>
           </mc:Choice>
-          <mc:Fallback>
+          <mc:Fallback xmlns="">
             <p:sp>
               <p:nvSpPr>
                 <p:cNvPr id="23" name="Rectangle 22">
@@ -19252,8 +19252,8 @@
             </p:sp>
           </mc:Fallback>
         </mc:AlternateContent>
-        <mc:AlternateContent xmlns:mc="http://schemas.openxmlformats.org/markup-compatibility/2006">
-          <mc:Choice xmlns:a14="http://schemas.microsoft.com/office/drawing/2010/main" Requires="a14">
+        <mc:AlternateContent xmlns:mc="http://schemas.openxmlformats.org/markup-compatibility/2006" xmlns:a14="http://schemas.microsoft.com/office/drawing/2010/main">
+          <mc:Choice Requires="a14">
             <p:sp>
               <p:nvSpPr>
                 <p:cNvPr id="24" name="Rectangle 23">
@@ -19356,7 +19356,7 @@
               </p:txBody>
             </p:sp>
           </mc:Choice>
-          <mc:Fallback>
+          <mc:Fallback xmlns="">
             <p:sp>
               <p:nvSpPr>
                 <p:cNvPr id="24" name="Rectangle 23">
@@ -19859,8 +19859,8 @@
             </a:p>
           </p:txBody>
         </p:sp>
-        <mc:AlternateContent xmlns:mc="http://schemas.openxmlformats.org/markup-compatibility/2006">
-          <mc:Choice xmlns:a14="http://schemas.microsoft.com/office/drawing/2010/main" Requires="a14">
+        <mc:AlternateContent xmlns:mc="http://schemas.openxmlformats.org/markup-compatibility/2006" xmlns:a14="http://schemas.microsoft.com/office/drawing/2010/main">
+          <mc:Choice Requires="a14">
             <p:sp>
               <p:nvSpPr>
                 <p:cNvPr id="4" name="Rectangle 3">
@@ -19963,7 +19963,7 @@
               </p:txBody>
             </p:sp>
           </mc:Choice>
-          <mc:Fallback>
+          <mc:Fallback xmlns="">
             <p:sp>
               <p:nvSpPr>
                 <p:cNvPr id="4" name="Rectangle 3">
@@ -20013,8 +20013,8 @@
             </p:sp>
           </mc:Fallback>
         </mc:AlternateContent>
-        <mc:AlternateContent xmlns:mc="http://schemas.openxmlformats.org/markup-compatibility/2006">
-          <mc:Choice xmlns:a14="http://schemas.microsoft.com/office/drawing/2010/main" Requires="a14">
+        <mc:AlternateContent xmlns:mc="http://schemas.openxmlformats.org/markup-compatibility/2006" xmlns:a14="http://schemas.microsoft.com/office/drawing/2010/main">
+          <mc:Choice Requires="a14">
             <p:sp>
               <p:nvSpPr>
                 <p:cNvPr id="13" name="Rectangle 12">
@@ -20119,7 +20119,7 @@
               </p:txBody>
             </p:sp>
           </mc:Choice>
-          <mc:Fallback>
+          <mc:Fallback xmlns="">
             <p:sp>
               <p:nvSpPr>
                 <p:cNvPr id="13" name="Rectangle 12">
@@ -20169,8 +20169,8 @@
             </p:sp>
           </mc:Fallback>
         </mc:AlternateContent>
-        <mc:AlternateContent xmlns:mc="http://schemas.openxmlformats.org/markup-compatibility/2006">
-          <mc:Choice xmlns:a14="http://schemas.microsoft.com/office/drawing/2010/main" Requires="a14">
+        <mc:AlternateContent xmlns:mc="http://schemas.openxmlformats.org/markup-compatibility/2006" xmlns:a14="http://schemas.microsoft.com/office/drawing/2010/main">
+          <mc:Choice Requires="a14">
             <p:sp>
               <p:nvSpPr>
                 <p:cNvPr id="14" name="Rectangle 13">
@@ -20273,7 +20273,7 @@
               </p:txBody>
             </p:sp>
           </mc:Choice>
-          <mc:Fallback>
+          <mc:Fallback xmlns="">
             <p:sp>
               <p:nvSpPr>
                 <p:cNvPr id="14" name="Rectangle 13">
@@ -20323,8 +20323,8 @@
             </p:sp>
           </mc:Fallback>
         </mc:AlternateContent>
-        <mc:AlternateContent xmlns:mc="http://schemas.openxmlformats.org/markup-compatibility/2006">
-          <mc:Choice xmlns:a14="http://schemas.microsoft.com/office/drawing/2010/main" Requires="a14">
+        <mc:AlternateContent xmlns:mc="http://schemas.openxmlformats.org/markup-compatibility/2006" xmlns:a14="http://schemas.microsoft.com/office/drawing/2010/main">
+          <mc:Choice Requires="a14">
             <p:sp>
               <p:nvSpPr>
                 <p:cNvPr id="15" name="Rectangle 14">
@@ -20429,7 +20429,7 @@
               </p:txBody>
             </p:sp>
           </mc:Choice>
-          <mc:Fallback>
+          <mc:Fallback xmlns="">
             <p:sp>
               <p:nvSpPr>
                 <p:cNvPr id="15" name="Rectangle 14">
@@ -20630,8 +20630,8 @@
             </a:p>
           </p:txBody>
         </p:sp>
-        <mc:AlternateContent xmlns:mc="http://schemas.openxmlformats.org/markup-compatibility/2006">
-          <mc:Choice xmlns:a14="http://schemas.microsoft.com/office/drawing/2010/main" Requires="a14">
+        <mc:AlternateContent xmlns:mc="http://schemas.openxmlformats.org/markup-compatibility/2006" xmlns:a14="http://schemas.microsoft.com/office/drawing/2010/main">
+          <mc:Choice Requires="a14">
             <p:sp>
               <p:nvSpPr>
                 <p:cNvPr id="29" name="Rectangle 28">
@@ -20736,7 +20736,7 @@
               </p:txBody>
             </p:sp>
           </mc:Choice>
-          <mc:Fallback>
+          <mc:Fallback xmlns="">
             <p:sp>
               <p:nvSpPr>
                 <p:cNvPr id="29" name="Rectangle 28">
@@ -20786,8 +20786,8 @@
             </p:sp>
           </mc:Fallback>
         </mc:AlternateContent>
-        <mc:AlternateContent xmlns:mc="http://schemas.openxmlformats.org/markup-compatibility/2006">
-          <mc:Choice xmlns:a14="http://schemas.microsoft.com/office/drawing/2010/main" Requires="a14">
+        <mc:AlternateContent xmlns:mc="http://schemas.openxmlformats.org/markup-compatibility/2006" xmlns:a14="http://schemas.microsoft.com/office/drawing/2010/main">
+          <mc:Choice Requires="a14">
             <p:sp>
               <p:nvSpPr>
                 <p:cNvPr id="30" name="Rectangle 29">
@@ -20890,7 +20890,7 @@
               </p:txBody>
             </p:sp>
           </mc:Choice>
-          <mc:Fallback>
+          <mc:Fallback xmlns="">
             <p:sp>
               <p:nvSpPr>
                 <p:cNvPr id="30" name="Rectangle 29">
@@ -20940,8 +20940,8 @@
             </p:sp>
           </mc:Fallback>
         </mc:AlternateContent>
-        <mc:AlternateContent xmlns:mc="http://schemas.openxmlformats.org/markup-compatibility/2006">
-          <mc:Choice xmlns:a14="http://schemas.microsoft.com/office/drawing/2010/main" Requires="a14">
+        <mc:AlternateContent xmlns:mc="http://schemas.openxmlformats.org/markup-compatibility/2006" xmlns:a14="http://schemas.microsoft.com/office/drawing/2010/main">
+          <mc:Choice Requires="a14">
             <p:sp>
               <p:nvSpPr>
                 <p:cNvPr id="31" name="Rectangle 30">
@@ -21046,7 +21046,7 @@
               </p:txBody>
             </p:sp>
           </mc:Choice>
-          <mc:Fallback>
+          <mc:Fallback xmlns="">
             <p:sp>
               <p:nvSpPr>
                 <p:cNvPr id="31" name="Rectangle 30">
@@ -21857,8 +21857,8 @@
           </a:p>
         </p:txBody>
       </p:sp>
-      <mc:AlternateContent xmlns:mc="http://schemas.openxmlformats.org/markup-compatibility/2006">
-        <mc:Choice xmlns:a14="http://schemas.microsoft.com/office/drawing/2010/main" Requires="a14">
+      <mc:AlternateContent xmlns:mc="http://schemas.openxmlformats.org/markup-compatibility/2006" xmlns:a14="http://schemas.microsoft.com/office/drawing/2010/main">
+        <mc:Choice Requires="a14">
           <p:sp>
             <p:nvSpPr>
               <p:cNvPr id="6" name="Content Placeholder 2">
@@ -22090,7 +22090,7 @@
             </p:txBody>
           </p:sp>
         </mc:Choice>
-        <mc:Fallback>
+        <mc:Fallback xmlns="">
           <p:sp>
             <p:nvSpPr>
               <p:cNvPr id="6" name="Content Placeholder 2">
@@ -22379,8 +22379,8 @@
           </a:p>
         </p:txBody>
       </p:sp>
-      <mc:AlternateContent xmlns:mc="http://schemas.openxmlformats.org/markup-compatibility/2006">
-        <mc:Choice xmlns:a14="http://schemas.microsoft.com/office/drawing/2010/main" Requires="a14">
+      <mc:AlternateContent xmlns:mc="http://schemas.openxmlformats.org/markup-compatibility/2006" xmlns:a14="http://schemas.microsoft.com/office/drawing/2010/main">
+        <mc:Choice Requires="a14">
           <p:sp>
             <p:nvSpPr>
               <p:cNvPr id="8" name="Content Placeholder 2">
@@ -22685,7 +22685,7 @@
             </p:txBody>
           </p:sp>
         </mc:Choice>
-        <mc:Fallback>
+        <mc:Fallback xmlns="">
           <p:sp>
             <p:nvSpPr>
               <p:cNvPr id="8" name="Content Placeholder 2">
@@ -23795,8 +23795,8 @@
             </a:p>
           </p:txBody>
         </p:sp>
-        <mc:AlternateContent xmlns:mc="http://schemas.openxmlformats.org/markup-compatibility/2006">
-          <mc:Choice xmlns:a14="http://schemas.microsoft.com/office/drawing/2010/main" Requires="a14">
+        <mc:AlternateContent xmlns:mc="http://schemas.openxmlformats.org/markup-compatibility/2006" xmlns:a14="http://schemas.microsoft.com/office/drawing/2010/main">
+          <mc:Choice Requires="a14">
             <p:sp>
               <p:nvSpPr>
                 <p:cNvPr id="13" name="Rectangle 12">
@@ -23899,7 +23899,7 @@
               </p:txBody>
             </p:sp>
           </mc:Choice>
-          <mc:Fallback>
+          <mc:Fallback xmlns="">
             <p:sp>
               <p:nvSpPr>
                 <p:cNvPr id="13" name="Rectangle 12">
@@ -23949,8 +23949,8 @@
             </p:sp>
           </mc:Fallback>
         </mc:AlternateContent>
-        <mc:AlternateContent xmlns:mc="http://schemas.openxmlformats.org/markup-compatibility/2006">
-          <mc:Choice xmlns:a14="http://schemas.microsoft.com/office/drawing/2010/main" Requires="a14">
+        <mc:AlternateContent xmlns:mc="http://schemas.openxmlformats.org/markup-compatibility/2006" xmlns:a14="http://schemas.microsoft.com/office/drawing/2010/main">
+          <mc:Choice Requires="a14">
             <p:sp>
               <p:nvSpPr>
                 <p:cNvPr id="14" name="Rectangle 13">
@@ -24051,7 +24051,7 @@
               </p:txBody>
             </p:sp>
           </mc:Choice>
-          <mc:Fallback>
+          <mc:Fallback xmlns="">
             <p:sp>
               <p:nvSpPr>
                 <p:cNvPr id="14" name="Rectangle 13">
@@ -24101,8 +24101,8 @@
             </p:sp>
           </mc:Fallback>
         </mc:AlternateContent>
-        <mc:AlternateContent xmlns:mc="http://schemas.openxmlformats.org/markup-compatibility/2006">
-          <mc:Choice xmlns:a14="http://schemas.microsoft.com/office/drawing/2010/main" Requires="a14">
+        <mc:AlternateContent xmlns:mc="http://schemas.openxmlformats.org/markup-compatibility/2006" xmlns:a14="http://schemas.microsoft.com/office/drawing/2010/main">
+          <mc:Choice Requires="a14">
             <p:sp>
               <p:nvSpPr>
                 <p:cNvPr id="15" name="Rectangle 14">
@@ -24205,7 +24205,7 @@
               </p:txBody>
             </p:sp>
           </mc:Choice>
-          <mc:Fallback>
+          <mc:Fallback xmlns="">
             <p:sp>
               <p:nvSpPr>
                 <p:cNvPr id="15" name="Rectangle 14">
@@ -24255,8 +24255,8 @@
             </p:sp>
           </mc:Fallback>
         </mc:AlternateContent>
-        <mc:AlternateContent xmlns:mc="http://schemas.openxmlformats.org/markup-compatibility/2006">
-          <mc:Choice xmlns:a14="http://schemas.microsoft.com/office/drawing/2010/main" Requires="a14">
+        <mc:AlternateContent xmlns:mc="http://schemas.openxmlformats.org/markup-compatibility/2006" xmlns:a14="http://schemas.microsoft.com/office/drawing/2010/main">
+          <mc:Choice Requires="a14">
             <p:sp>
               <p:nvSpPr>
                 <p:cNvPr id="16" name="Rectangle 15">
@@ -24359,7 +24359,7 @@
               </p:txBody>
             </p:sp>
           </mc:Choice>
-          <mc:Fallback>
+          <mc:Fallback xmlns="">
             <p:sp>
               <p:nvSpPr>
                 <p:cNvPr id="16" name="Rectangle 15">
@@ -24449,8 +24449,8 @@
             </a:p>
           </p:txBody>
         </p:sp>
-        <mc:AlternateContent xmlns:mc="http://schemas.openxmlformats.org/markup-compatibility/2006">
-          <mc:Choice xmlns:a14="http://schemas.microsoft.com/office/drawing/2010/main" Requires="a14">
+        <mc:AlternateContent xmlns:mc="http://schemas.openxmlformats.org/markup-compatibility/2006" xmlns:a14="http://schemas.microsoft.com/office/drawing/2010/main">
+          <mc:Choice Requires="a14">
             <p:sp>
               <p:nvSpPr>
                 <p:cNvPr id="18" name="Rectangle 17">
@@ -24551,7 +24551,7 @@
               </p:txBody>
             </p:sp>
           </mc:Choice>
-          <mc:Fallback>
+          <mc:Fallback xmlns="">
             <p:sp>
               <p:nvSpPr>
                 <p:cNvPr id="18" name="Rectangle 17">
@@ -24601,8 +24601,8 @@
             </p:sp>
           </mc:Fallback>
         </mc:AlternateContent>
-        <mc:AlternateContent xmlns:mc="http://schemas.openxmlformats.org/markup-compatibility/2006">
-          <mc:Choice xmlns:a14="http://schemas.microsoft.com/office/drawing/2010/main" Requires="a14">
+        <mc:AlternateContent xmlns:mc="http://schemas.openxmlformats.org/markup-compatibility/2006" xmlns:a14="http://schemas.microsoft.com/office/drawing/2010/main">
+          <mc:Choice Requires="a14">
             <p:sp>
               <p:nvSpPr>
                 <p:cNvPr id="19" name="Rectangle 18">
@@ -24703,7 +24703,7 @@
               </p:txBody>
             </p:sp>
           </mc:Choice>
-          <mc:Fallback>
+          <mc:Fallback xmlns="">
             <p:sp>
               <p:nvSpPr>
                 <p:cNvPr id="19" name="Rectangle 18">
@@ -24753,8 +24753,8 @@
             </p:sp>
           </mc:Fallback>
         </mc:AlternateContent>
-        <mc:AlternateContent xmlns:mc="http://schemas.openxmlformats.org/markup-compatibility/2006">
-          <mc:Choice xmlns:a14="http://schemas.microsoft.com/office/drawing/2010/main" Requires="a14">
+        <mc:AlternateContent xmlns:mc="http://schemas.openxmlformats.org/markup-compatibility/2006" xmlns:a14="http://schemas.microsoft.com/office/drawing/2010/main">
+          <mc:Choice Requires="a14">
             <p:sp>
               <p:nvSpPr>
                 <p:cNvPr id="20" name="Rectangle 19">
@@ -24857,7 +24857,7 @@
               </p:txBody>
             </p:sp>
           </mc:Choice>
-          <mc:Fallback>
+          <mc:Fallback xmlns="">
             <p:sp>
               <p:nvSpPr>
                 <p:cNvPr id="20" name="Rectangle 19">
@@ -24907,8 +24907,8 @@
             </p:sp>
           </mc:Fallback>
         </mc:AlternateContent>
-        <mc:AlternateContent xmlns:mc="http://schemas.openxmlformats.org/markup-compatibility/2006">
-          <mc:Choice xmlns:a14="http://schemas.microsoft.com/office/drawing/2010/main" Requires="a14">
+        <mc:AlternateContent xmlns:mc="http://schemas.openxmlformats.org/markup-compatibility/2006" xmlns:a14="http://schemas.microsoft.com/office/drawing/2010/main">
+          <mc:Choice Requires="a14">
             <p:sp>
               <p:nvSpPr>
                 <p:cNvPr id="21" name="Rectangle 20">
@@ -25011,7 +25011,7 @@
               </p:txBody>
             </p:sp>
           </mc:Choice>
-          <mc:Fallback>
+          <mc:Fallback xmlns="">
             <p:sp>
               <p:nvSpPr>
                 <p:cNvPr id="21" name="Rectangle 20">
@@ -25061,8 +25061,8 @@
             </p:sp>
           </mc:Fallback>
         </mc:AlternateContent>
-        <mc:AlternateContent xmlns:mc="http://schemas.openxmlformats.org/markup-compatibility/2006">
-          <mc:Choice xmlns:a14="http://schemas.microsoft.com/office/drawing/2010/main" Requires="a14">
+        <mc:AlternateContent xmlns:mc="http://schemas.openxmlformats.org/markup-compatibility/2006" xmlns:a14="http://schemas.microsoft.com/office/drawing/2010/main">
+          <mc:Choice Requires="a14">
             <p:sp>
               <p:nvSpPr>
                 <p:cNvPr id="22" name="Rectangle 21">
@@ -25165,7 +25165,7 @@
               </p:txBody>
             </p:sp>
           </mc:Choice>
-          <mc:Fallback>
+          <mc:Fallback xmlns="">
             <p:sp>
               <p:nvSpPr>
                 <p:cNvPr id="22" name="Rectangle 21">
@@ -25215,8 +25215,8 @@
             </p:sp>
           </mc:Fallback>
         </mc:AlternateContent>
-        <mc:AlternateContent xmlns:mc="http://schemas.openxmlformats.org/markup-compatibility/2006">
-          <mc:Choice xmlns:a14="http://schemas.microsoft.com/office/drawing/2010/main" Requires="a14">
+        <mc:AlternateContent xmlns:mc="http://schemas.openxmlformats.org/markup-compatibility/2006" xmlns:a14="http://schemas.microsoft.com/office/drawing/2010/main">
+          <mc:Choice Requires="a14">
             <p:sp>
               <p:nvSpPr>
                 <p:cNvPr id="23" name="Rectangle 22">
@@ -25317,7 +25317,7 @@
               </p:txBody>
             </p:sp>
           </mc:Choice>
-          <mc:Fallback>
+          <mc:Fallback xmlns="">
             <p:sp>
               <p:nvSpPr>
                 <p:cNvPr id="23" name="Rectangle 22">
@@ -25367,8 +25367,8 @@
             </p:sp>
           </mc:Fallback>
         </mc:AlternateContent>
-        <mc:AlternateContent xmlns:mc="http://schemas.openxmlformats.org/markup-compatibility/2006">
-          <mc:Choice xmlns:a14="http://schemas.microsoft.com/office/drawing/2010/main" Requires="a14">
+        <mc:AlternateContent xmlns:mc="http://schemas.openxmlformats.org/markup-compatibility/2006" xmlns:a14="http://schemas.microsoft.com/office/drawing/2010/main">
+          <mc:Choice Requires="a14">
             <p:sp>
               <p:nvSpPr>
                 <p:cNvPr id="24" name="Rectangle 23">
@@ -25469,7 +25469,7 @@
               </p:txBody>
             </p:sp>
           </mc:Choice>
-          <mc:Fallback>
+          <mc:Fallback xmlns="">
             <p:sp>
               <p:nvSpPr>
                 <p:cNvPr id="24" name="Rectangle 23">
@@ -25519,8 +25519,8 @@
             </p:sp>
           </mc:Fallback>
         </mc:AlternateContent>
-        <mc:AlternateContent xmlns:mc="http://schemas.openxmlformats.org/markup-compatibility/2006">
-          <mc:Choice xmlns:a14="http://schemas.microsoft.com/office/drawing/2010/main" Requires="a14">
+        <mc:AlternateContent xmlns:mc="http://schemas.openxmlformats.org/markup-compatibility/2006" xmlns:a14="http://schemas.microsoft.com/office/drawing/2010/main">
+          <mc:Choice Requires="a14">
             <p:sp>
               <p:nvSpPr>
                 <p:cNvPr id="25" name="Rectangle 24">
@@ -25621,7 +25621,7 @@
               </p:txBody>
             </p:sp>
           </mc:Choice>
-          <mc:Fallback>
+          <mc:Fallback xmlns="">
             <p:sp>
               <p:nvSpPr>
                 <p:cNvPr id="25" name="Rectangle 24">
@@ -26032,8 +26032,8 @@
           </a:p>
         </p:txBody>
       </p:sp>
-      <mc:AlternateContent xmlns:mc="http://schemas.openxmlformats.org/markup-compatibility/2006">
-        <mc:Choice xmlns:a14="http://schemas.microsoft.com/office/drawing/2010/main" Requires="a14">
+      <mc:AlternateContent xmlns:mc="http://schemas.openxmlformats.org/markup-compatibility/2006" xmlns:a14="http://schemas.microsoft.com/office/drawing/2010/main">
+        <mc:Choice Requires="a14">
           <p:sp>
             <p:nvSpPr>
               <p:cNvPr id="57" name="Rectangle 56">
@@ -26134,7 +26134,7 @@
             </p:txBody>
           </p:sp>
         </mc:Choice>
-        <mc:Fallback>
+        <mc:Fallback xmlns="">
           <p:sp>
             <p:nvSpPr>
               <p:cNvPr id="57" name="Rectangle 56">
@@ -26184,8 +26184,8 @@
           </p:sp>
         </mc:Fallback>
       </mc:AlternateContent>
-      <mc:AlternateContent xmlns:mc="http://schemas.openxmlformats.org/markup-compatibility/2006">
-        <mc:Choice xmlns:a14="http://schemas.microsoft.com/office/drawing/2010/main" Requires="a14">
+      <mc:AlternateContent xmlns:mc="http://schemas.openxmlformats.org/markup-compatibility/2006" xmlns:a14="http://schemas.microsoft.com/office/drawing/2010/main">
+        <mc:Choice Requires="a14">
           <p:sp>
             <p:nvSpPr>
               <p:cNvPr id="58" name="Rectangle 57">
@@ -26288,7 +26288,7 @@
             </p:txBody>
           </p:sp>
         </mc:Choice>
-        <mc:Fallback>
+        <mc:Fallback xmlns="">
           <p:sp>
             <p:nvSpPr>
               <p:cNvPr id="58" name="Rectangle 57">
@@ -26338,8 +26338,8 @@
           </p:sp>
         </mc:Fallback>
       </mc:AlternateContent>
-      <mc:AlternateContent xmlns:mc="http://schemas.openxmlformats.org/markup-compatibility/2006">
-        <mc:Choice xmlns:a14="http://schemas.microsoft.com/office/drawing/2010/main" Requires="a14">
+      <mc:AlternateContent xmlns:mc="http://schemas.openxmlformats.org/markup-compatibility/2006" xmlns:a14="http://schemas.microsoft.com/office/drawing/2010/main">
+        <mc:Choice Requires="a14">
           <p:sp>
             <p:nvSpPr>
               <p:cNvPr id="59" name="Rectangle 58">
@@ -26440,7 +26440,7 @@
             </p:txBody>
           </p:sp>
         </mc:Choice>
-        <mc:Fallback>
+        <mc:Fallback xmlns="">
           <p:sp>
             <p:nvSpPr>
               <p:cNvPr id="59" name="Rectangle 58">
@@ -26490,8 +26490,8 @@
           </p:sp>
         </mc:Fallback>
       </mc:AlternateContent>
-      <mc:AlternateContent xmlns:mc="http://schemas.openxmlformats.org/markup-compatibility/2006">
-        <mc:Choice xmlns:a14="http://schemas.microsoft.com/office/drawing/2010/main" Requires="a14">
+      <mc:AlternateContent xmlns:mc="http://schemas.openxmlformats.org/markup-compatibility/2006" xmlns:a14="http://schemas.microsoft.com/office/drawing/2010/main">
+        <mc:Choice Requires="a14">
           <p:sp>
             <p:nvSpPr>
               <p:cNvPr id="60" name="Rectangle 59">
@@ -26592,7 +26592,7 @@
             </p:txBody>
           </p:sp>
         </mc:Choice>
-        <mc:Fallback>
+        <mc:Fallback xmlns="">
           <p:sp>
             <p:nvSpPr>
               <p:cNvPr id="60" name="Rectangle 59">
@@ -26682,8 +26682,8 @@
           </a:p>
         </p:txBody>
       </p:sp>
-      <mc:AlternateContent xmlns:mc="http://schemas.openxmlformats.org/markup-compatibility/2006">
-        <mc:Choice xmlns:a14="http://schemas.microsoft.com/office/drawing/2010/main" Requires="a14">
+      <mc:AlternateContent xmlns:mc="http://schemas.openxmlformats.org/markup-compatibility/2006" xmlns:a14="http://schemas.microsoft.com/office/drawing/2010/main">
+        <mc:Choice Requires="a14">
           <p:sp>
             <p:nvSpPr>
               <p:cNvPr id="62" name="Rectangle 61">
@@ -26786,7 +26786,7 @@
             </p:txBody>
           </p:sp>
         </mc:Choice>
-        <mc:Fallback>
+        <mc:Fallback xmlns="">
           <p:sp>
             <p:nvSpPr>
               <p:cNvPr id="62" name="Rectangle 61">
@@ -26836,8 +26836,8 @@
           </p:sp>
         </mc:Fallback>
       </mc:AlternateContent>
-      <mc:AlternateContent xmlns:mc="http://schemas.openxmlformats.org/markup-compatibility/2006">
-        <mc:Choice xmlns:a14="http://schemas.microsoft.com/office/drawing/2010/main" Requires="a14">
+      <mc:AlternateContent xmlns:mc="http://schemas.openxmlformats.org/markup-compatibility/2006" xmlns:a14="http://schemas.microsoft.com/office/drawing/2010/main">
+        <mc:Choice Requires="a14">
           <p:sp>
             <p:nvSpPr>
               <p:cNvPr id="63" name="Rectangle 62">
@@ -26940,7 +26940,7 @@
             </p:txBody>
           </p:sp>
         </mc:Choice>
-        <mc:Fallback>
+        <mc:Fallback xmlns="">
           <p:sp>
             <p:nvSpPr>
               <p:cNvPr id="63" name="Rectangle 62">
@@ -26990,8 +26990,8 @@
           </p:sp>
         </mc:Fallback>
       </mc:AlternateContent>
-      <mc:AlternateContent xmlns:mc="http://schemas.openxmlformats.org/markup-compatibility/2006">
-        <mc:Choice xmlns:a14="http://schemas.microsoft.com/office/drawing/2010/main" Requires="a14">
+      <mc:AlternateContent xmlns:mc="http://schemas.openxmlformats.org/markup-compatibility/2006" xmlns:a14="http://schemas.microsoft.com/office/drawing/2010/main">
+        <mc:Choice Requires="a14">
           <p:sp>
             <p:nvSpPr>
               <p:cNvPr id="64" name="Rectangle 63">
@@ -27092,7 +27092,7 @@
             </p:txBody>
           </p:sp>
         </mc:Choice>
-        <mc:Fallback>
+        <mc:Fallback xmlns="">
           <p:sp>
             <p:nvSpPr>
               <p:cNvPr id="64" name="Rectangle 63">
@@ -27142,8 +27142,8 @@
           </p:sp>
         </mc:Fallback>
       </mc:AlternateContent>
-      <mc:AlternateContent xmlns:mc="http://schemas.openxmlformats.org/markup-compatibility/2006">
-        <mc:Choice xmlns:a14="http://schemas.microsoft.com/office/drawing/2010/main" Requires="a14">
+      <mc:AlternateContent xmlns:mc="http://schemas.openxmlformats.org/markup-compatibility/2006" xmlns:a14="http://schemas.microsoft.com/office/drawing/2010/main">
+        <mc:Choice Requires="a14">
           <p:sp>
             <p:nvSpPr>
               <p:cNvPr id="65" name="Rectangle 64">
@@ -27244,7 +27244,7 @@
             </p:txBody>
           </p:sp>
         </mc:Choice>
-        <mc:Fallback>
+        <mc:Fallback xmlns="">
           <p:sp>
             <p:nvSpPr>
               <p:cNvPr id="65" name="Rectangle 64">
@@ -27294,8 +27294,8 @@
           </p:sp>
         </mc:Fallback>
       </mc:AlternateContent>
-      <mc:AlternateContent xmlns:mc="http://schemas.openxmlformats.org/markup-compatibility/2006">
-        <mc:Choice xmlns:a14="http://schemas.microsoft.com/office/drawing/2010/main" Requires="a14">
+      <mc:AlternateContent xmlns:mc="http://schemas.openxmlformats.org/markup-compatibility/2006" xmlns:a14="http://schemas.microsoft.com/office/drawing/2010/main">
+        <mc:Choice Requires="a14">
           <p:sp>
             <p:nvSpPr>
               <p:cNvPr id="66" name="Rectangle 65">
@@ -27396,7 +27396,7 @@
             </p:txBody>
           </p:sp>
         </mc:Choice>
-        <mc:Fallback>
+        <mc:Fallback xmlns="">
           <p:sp>
             <p:nvSpPr>
               <p:cNvPr id="66" name="Rectangle 65">
@@ -27446,8 +27446,8 @@
           </p:sp>
         </mc:Fallback>
       </mc:AlternateContent>
-      <mc:AlternateContent xmlns:mc="http://schemas.openxmlformats.org/markup-compatibility/2006">
-        <mc:Choice xmlns:a14="http://schemas.microsoft.com/office/drawing/2010/main" Requires="a14">
+      <mc:AlternateContent xmlns:mc="http://schemas.openxmlformats.org/markup-compatibility/2006" xmlns:a14="http://schemas.microsoft.com/office/drawing/2010/main">
+        <mc:Choice Requires="a14">
           <p:sp>
             <p:nvSpPr>
               <p:cNvPr id="67" name="Rectangle 66">
@@ -27550,7 +27550,7 @@
             </p:txBody>
           </p:sp>
         </mc:Choice>
-        <mc:Fallback>
+        <mc:Fallback xmlns="">
           <p:sp>
             <p:nvSpPr>
               <p:cNvPr id="67" name="Rectangle 66">
@@ -27600,8 +27600,8 @@
           </p:sp>
         </mc:Fallback>
       </mc:AlternateContent>
-      <mc:AlternateContent xmlns:mc="http://schemas.openxmlformats.org/markup-compatibility/2006">
-        <mc:Choice xmlns:a14="http://schemas.microsoft.com/office/drawing/2010/main" Requires="a14">
+      <mc:AlternateContent xmlns:mc="http://schemas.openxmlformats.org/markup-compatibility/2006" xmlns:a14="http://schemas.microsoft.com/office/drawing/2010/main">
+        <mc:Choice Requires="a14">
           <p:sp>
             <p:nvSpPr>
               <p:cNvPr id="68" name="Rectangle 67">
@@ -27704,7 +27704,7 @@
             </p:txBody>
           </p:sp>
         </mc:Choice>
-        <mc:Fallback>
+        <mc:Fallback xmlns="">
           <p:sp>
             <p:nvSpPr>
               <p:cNvPr id="68" name="Rectangle 67">
@@ -27754,8 +27754,8 @@
           </p:sp>
         </mc:Fallback>
       </mc:AlternateContent>
-      <mc:AlternateContent xmlns:mc="http://schemas.openxmlformats.org/markup-compatibility/2006">
-        <mc:Choice xmlns:a14="http://schemas.microsoft.com/office/drawing/2010/main" Requires="a14">
+      <mc:AlternateContent xmlns:mc="http://schemas.openxmlformats.org/markup-compatibility/2006" xmlns:a14="http://schemas.microsoft.com/office/drawing/2010/main">
+        <mc:Choice Requires="a14">
           <p:sp>
             <p:nvSpPr>
               <p:cNvPr id="69" name="Rectangle 68">
@@ -27858,7 +27858,7 @@
             </p:txBody>
           </p:sp>
         </mc:Choice>
-        <mc:Fallback>
+        <mc:Fallback xmlns="">
           <p:sp>
             <p:nvSpPr>
               <p:cNvPr id="69" name="Rectangle 68">

--- a/slides/04-4-DividingResources.pptx
+++ b/slides/04-4-DividingResources.pptx
@@ -208,7 +208,7 @@
           <a:p>
             <a:fld id="{C5B45307-6ED4-B142-BD64-10F739779302}" type="datetimeFigureOut">
               <a:rPr lang="en-US" smtClean="0"/>
-              <a:t>10/7/25</a:t>
+              <a:t>10/20/25</a:t>
             </a:fld>
             <a:endParaRPr lang="en-US"/>
           </a:p>
@@ -616,7 +616,7 @@
           <a:noFill/>
           <a:extLst>
             <a:ext uri="{909E8E84-426E-40dd-AFC4-6F175D3DCCD1}">
-              <a14:hiddenFill xmlns="" xmlns:a14="http://schemas.microsoft.com/office/drawing/2010/main">
+              <a14:hiddenFill xmlns:a14="http://schemas.microsoft.com/office/drawing/2010/main" xmlns="">
                 <a:solidFill>
                   <a:srgbClr val="FFFFFF"/>
                 </a:solidFill>
@@ -675,7 +675,7 @@
             </a:ln>
             <a:extLst>
               <a:ext uri="{91240B29-F687-4f45-9708-019B960494DF}">
-                <a14:hiddenLine xmlns="" xmlns:a14="http://schemas.microsoft.com/office/drawing/2010/main" w="9525">
+                <a14:hiddenLine xmlns:a14="http://schemas.microsoft.com/office/drawing/2010/main" xmlns="" w="9525">
                   <a:solidFill>
                     <a:srgbClr val="000000"/>
                   </a:solidFill>
@@ -765,7 +765,7 @@
             </a:ln>
             <a:extLst>
               <a:ext uri="{91240B29-F687-4f45-9708-019B960494DF}">
-                <a14:hiddenLine xmlns="" xmlns:a14="http://schemas.microsoft.com/office/drawing/2010/main" w="9525">
+                <a14:hiddenLine xmlns:a14="http://schemas.microsoft.com/office/drawing/2010/main" xmlns="" w="9525">
                   <a:solidFill>
                     <a:srgbClr val="000000"/>
                   </a:solidFill>
@@ -855,7 +855,7 @@
             </a:ln>
             <a:extLst>
               <a:ext uri="{91240B29-F687-4f45-9708-019B960494DF}">
-                <a14:hiddenLine xmlns="" xmlns:a14="http://schemas.microsoft.com/office/drawing/2010/main" w="9525">
+                <a14:hiddenLine xmlns:a14="http://schemas.microsoft.com/office/drawing/2010/main" xmlns="" w="9525">
                   <a:solidFill>
                     <a:srgbClr val="000000"/>
                   </a:solidFill>
@@ -889,7 +889,7 @@
             </a:ln>
             <a:extLst>
               <a:ext uri="{91240B29-F687-4f45-9708-019B960494DF}">
-                <a14:hiddenLine xmlns="" xmlns:a14="http://schemas.microsoft.com/office/drawing/2010/main" w="9525">
+                <a14:hiddenLine xmlns:a14="http://schemas.microsoft.com/office/drawing/2010/main" xmlns="" w="9525">
                   <a:solidFill>
                     <a:srgbClr val="000000"/>
                   </a:solidFill>
@@ -979,7 +979,7 @@
             </a:ln>
             <a:extLst>
               <a:ext uri="{91240B29-F687-4f45-9708-019B960494DF}">
-                <a14:hiddenLine xmlns="" xmlns:a14="http://schemas.microsoft.com/office/drawing/2010/main" w="9525">
+                <a14:hiddenLine xmlns:a14="http://schemas.microsoft.com/office/drawing/2010/main" xmlns="" w="9525">
                   <a:solidFill>
                     <a:srgbClr val="000000"/>
                   </a:solidFill>
@@ -1041,7 +1041,7 @@
             </a:ln>
             <a:extLst>
               <a:ext uri="{91240B29-F687-4f45-9708-019B960494DF}">
-                <a14:hiddenLine xmlns="" xmlns:a14="http://schemas.microsoft.com/office/drawing/2010/main" w="9525">
+                <a14:hiddenLine xmlns:a14="http://schemas.microsoft.com/office/drawing/2010/main" xmlns="" w="9525">
                   <a:solidFill>
                     <a:srgbClr val="000000"/>
                   </a:solidFill>
@@ -1103,7 +1103,7 @@
             </a:ln>
             <a:extLst>
               <a:ext uri="{91240B29-F687-4f45-9708-019B960494DF}">
-                <a14:hiddenLine xmlns="" xmlns:a14="http://schemas.microsoft.com/office/drawing/2010/main" w="9525">
+                <a14:hiddenLine xmlns:a14="http://schemas.microsoft.com/office/drawing/2010/main" xmlns="" w="9525">
                   <a:solidFill>
                     <a:srgbClr val="000000"/>
                   </a:solidFill>
@@ -1193,7 +1193,7 @@
             </a:ln>
             <a:extLst>
               <a:ext uri="{91240B29-F687-4f45-9708-019B960494DF}">
-                <a14:hiddenLine xmlns="" xmlns:a14="http://schemas.microsoft.com/office/drawing/2010/main" w="9525">
+                <a14:hiddenLine xmlns:a14="http://schemas.microsoft.com/office/drawing/2010/main" xmlns="" w="9525">
                   <a:solidFill>
                     <a:srgbClr val="000000"/>
                   </a:solidFill>
@@ -1255,7 +1255,7 @@
             </a:ln>
             <a:extLst>
               <a:ext uri="{91240B29-F687-4f45-9708-019B960494DF}">
-                <a14:hiddenLine xmlns="" xmlns:a14="http://schemas.microsoft.com/office/drawing/2010/main" w="9525">
+                <a14:hiddenLine xmlns:a14="http://schemas.microsoft.com/office/drawing/2010/main" xmlns="" w="9525">
                   <a:solidFill>
                     <a:srgbClr val="000000"/>
                   </a:solidFill>
@@ -1317,7 +1317,7 @@
             </a:ln>
             <a:extLst>
               <a:ext uri="{91240B29-F687-4f45-9708-019B960494DF}">
-                <a14:hiddenLine xmlns="" xmlns:a14="http://schemas.microsoft.com/office/drawing/2010/main" w="9525">
+                <a14:hiddenLine xmlns:a14="http://schemas.microsoft.com/office/drawing/2010/main" xmlns="" w="9525">
                   <a:solidFill>
                     <a:srgbClr val="000000"/>
                   </a:solidFill>
@@ -1407,7 +1407,7 @@
             </a:ln>
             <a:extLst>
               <a:ext uri="{91240B29-F687-4f45-9708-019B960494DF}">
-                <a14:hiddenLine xmlns="" xmlns:a14="http://schemas.microsoft.com/office/drawing/2010/main" w="9525">
+                <a14:hiddenLine xmlns:a14="http://schemas.microsoft.com/office/drawing/2010/main" xmlns="" w="9525">
                   <a:solidFill>
                     <a:srgbClr val="000000"/>
                   </a:solidFill>
@@ -1497,7 +1497,7 @@
             </a:ln>
             <a:extLst>
               <a:ext uri="{91240B29-F687-4f45-9708-019B960494DF}">
-                <a14:hiddenLine xmlns="" xmlns:a14="http://schemas.microsoft.com/office/drawing/2010/main" w="9525">
+                <a14:hiddenLine xmlns:a14="http://schemas.microsoft.com/office/drawing/2010/main" xmlns="" w="9525">
                   <a:solidFill>
                     <a:srgbClr val="000000"/>
                   </a:solidFill>
@@ -1559,7 +1559,7 @@
             </a:ln>
             <a:extLst>
               <a:ext uri="{91240B29-F687-4f45-9708-019B960494DF}">
-                <a14:hiddenLine xmlns="" xmlns:a14="http://schemas.microsoft.com/office/drawing/2010/main" w="9525">
+                <a14:hiddenLine xmlns:a14="http://schemas.microsoft.com/office/drawing/2010/main" xmlns="" w="9525">
                   <a:solidFill>
                     <a:srgbClr val="000000"/>
                   </a:solidFill>
@@ -1669,7 +1669,7 @@
             </a:ln>
             <a:extLst>
               <a:ext uri="{91240B29-F687-4f45-9708-019B960494DF}">
-                <a14:hiddenLine xmlns="" xmlns:a14="http://schemas.microsoft.com/office/drawing/2010/main" w="9525">
+                <a14:hiddenLine xmlns:a14="http://schemas.microsoft.com/office/drawing/2010/main" xmlns="" w="9525">
                   <a:solidFill>
                     <a:srgbClr val="000000"/>
                   </a:solidFill>
@@ -1731,7 +1731,7 @@
             </a:ln>
             <a:extLst>
               <a:ext uri="{91240B29-F687-4f45-9708-019B960494DF}">
-                <a14:hiddenLine xmlns="" xmlns:a14="http://schemas.microsoft.com/office/drawing/2010/main" w="9525">
+                <a14:hiddenLine xmlns:a14="http://schemas.microsoft.com/office/drawing/2010/main" xmlns="" w="9525">
                   <a:solidFill>
                     <a:srgbClr val="000000"/>
                   </a:solidFill>
@@ -1821,7 +1821,7 @@
             </a:ln>
             <a:extLst>
               <a:ext uri="{91240B29-F687-4f45-9708-019B960494DF}">
-                <a14:hiddenLine xmlns="" xmlns:a14="http://schemas.microsoft.com/office/drawing/2010/main" w="9525">
+                <a14:hiddenLine xmlns:a14="http://schemas.microsoft.com/office/drawing/2010/main" xmlns="" w="9525">
                   <a:solidFill>
                     <a:srgbClr val="000000"/>
                   </a:solidFill>
@@ -1911,7 +1911,7 @@
             </a:ln>
             <a:extLst>
               <a:ext uri="{91240B29-F687-4f45-9708-019B960494DF}">
-                <a14:hiddenLine xmlns="" xmlns:a14="http://schemas.microsoft.com/office/drawing/2010/main" w="9525">
+                <a14:hiddenLine xmlns:a14="http://schemas.microsoft.com/office/drawing/2010/main" xmlns="" w="9525">
                   <a:solidFill>
                     <a:srgbClr val="000000"/>
                   </a:solidFill>
@@ -1973,7 +1973,7 @@
             </a:ln>
             <a:extLst>
               <a:ext uri="{91240B29-F687-4f45-9708-019B960494DF}">
-                <a14:hiddenLine xmlns="" xmlns:a14="http://schemas.microsoft.com/office/drawing/2010/main" w="9525">
+                <a14:hiddenLine xmlns:a14="http://schemas.microsoft.com/office/drawing/2010/main" xmlns="" w="9525">
                   <a:solidFill>
                     <a:srgbClr val="000000"/>
                   </a:solidFill>
@@ -2063,7 +2063,7 @@
             </a:ln>
             <a:extLst>
               <a:ext uri="{91240B29-F687-4f45-9708-019B960494DF}">
-                <a14:hiddenLine xmlns="" xmlns:a14="http://schemas.microsoft.com/office/drawing/2010/main" w="9525">
+                <a14:hiddenLine xmlns:a14="http://schemas.microsoft.com/office/drawing/2010/main" xmlns="" w="9525">
                   <a:solidFill>
                     <a:srgbClr val="000000"/>
                   </a:solidFill>
@@ -2153,7 +2153,7 @@
             </a:ln>
             <a:extLst>
               <a:ext uri="{91240B29-F687-4f45-9708-019B960494DF}">
-                <a14:hiddenLine xmlns="" xmlns:a14="http://schemas.microsoft.com/office/drawing/2010/main" w="9525">
+                <a14:hiddenLine xmlns:a14="http://schemas.microsoft.com/office/drawing/2010/main" xmlns="" w="9525">
                   <a:solidFill>
                     <a:srgbClr val="000000"/>
                   </a:solidFill>
@@ -2209,7 +2209,7 @@
             </a:ln>
             <a:extLst>
               <a:ext uri="{91240B29-F687-4f45-9708-019B960494DF}">
-                <a14:hiddenLine xmlns="" xmlns:a14="http://schemas.microsoft.com/office/drawing/2010/main" w="9525">
+                <a14:hiddenLine xmlns:a14="http://schemas.microsoft.com/office/drawing/2010/main" xmlns="" w="9525">
                   <a:solidFill>
                     <a:srgbClr val="000000"/>
                   </a:solidFill>
@@ -2299,7 +2299,7 @@
             </a:ln>
             <a:extLst>
               <a:ext uri="{91240B29-F687-4f45-9708-019B960494DF}">
-                <a14:hiddenLine xmlns="" xmlns:a14="http://schemas.microsoft.com/office/drawing/2010/main" w="9525">
+                <a14:hiddenLine xmlns:a14="http://schemas.microsoft.com/office/drawing/2010/main" xmlns="" w="9525">
                   <a:solidFill>
                     <a:srgbClr val="000000"/>
                   </a:solidFill>
@@ -2355,7 +2355,7 @@
             </a:ln>
             <a:extLst>
               <a:ext uri="{91240B29-F687-4f45-9708-019B960494DF}">
-                <a14:hiddenLine xmlns="" xmlns:a14="http://schemas.microsoft.com/office/drawing/2010/main" w="9525">
+                <a14:hiddenLine xmlns:a14="http://schemas.microsoft.com/office/drawing/2010/main" xmlns="" w="9525">
                   <a:solidFill>
                     <a:srgbClr val="000000"/>
                   </a:solidFill>
@@ -2445,7 +2445,7 @@
             </a:ln>
             <a:extLst>
               <a:ext uri="{91240B29-F687-4f45-9708-019B960494DF}">
-                <a14:hiddenLine xmlns="" xmlns:a14="http://schemas.microsoft.com/office/drawing/2010/main" w="9525">
+                <a14:hiddenLine xmlns:a14="http://schemas.microsoft.com/office/drawing/2010/main" xmlns="" w="9525">
                   <a:solidFill>
                     <a:srgbClr val="000000"/>
                   </a:solidFill>
@@ -2513,7 +2513,7 @@
             </a:ln>
             <a:extLst>
               <a:ext uri="{91240B29-F687-4f45-9708-019B960494DF}">
-                <a14:hiddenLine xmlns="" xmlns:a14="http://schemas.microsoft.com/office/drawing/2010/main" w="9525">
+                <a14:hiddenLine xmlns:a14="http://schemas.microsoft.com/office/drawing/2010/main" xmlns="" w="9525">
                   <a:solidFill>
                     <a:srgbClr val="000000"/>
                   </a:solidFill>
@@ -2603,7 +2603,7 @@
             </a:ln>
             <a:extLst>
               <a:ext uri="{91240B29-F687-4f45-9708-019B960494DF}">
-                <a14:hiddenLine xmlns="" xmlns:a14="http://schemas.microsoft.com/office/drawing/2010/main" w="9525">
+                <a14:hiddenLine xmlns:a14="http://schemas.microsoft.com/office/drawing/2010/main" xmlns="" w="9525">
                   <a:solidFill>
                     <a:srgbClr val="000000"/>
                   </a:solidFill>
@@ -2671,7 +2671,7 @@
             </a:ln>
             <a:extLst>
               <a:ext uri="{91240B29-F687-4f45-9708-019B960494DF}">
-                <a14:hiddenLine xmlns="" xmlns:a14="http://schemas.microsoft.com/office/drawing/2010/main" w="9525">
+                <a14:hiddenLine xmlns:a14="http://schemas.microsoft.com/office/drawing/2010/main" xmlns="" w="9525">
                   <a:solidFill>
                     <a:srgbClr val="000000"/>
                   </a:solidFill>
@@ -2761,7 +2761,7 @@
             </a:ln>
             <a:extLst>
               <a:ext uri="{91240B29-F687-4f45-9708-019B960494DF}">
-                <a14:hiddenLine xmlns="" xmlns:a14="http://schemas.microsoft.com/office/drawing/2010/main" w="9525">
+                <a14:hiddenLine xmlns:a14="http://schemas.microsoft.com/office/drawing/2010/main" xmlns="" w="9525">
                   <a:solidFill>
                     <a:srgbClr val="000000"/>
                   </a:solidFill>
@@ -2795,7 +2795,7 @@
             </a:ln>
             <a:extLst>
               <a:ext uri="{91240B29-F687-4f45-9708-019B960494DF}">
-                <a14:hiddenLine xmlns="" xmlns:a14="http://schemas.microsoft.com/office/drawing/2010/main" w="9525">
+                <a14:hiddenLine xmlns:a14="http://schemas.microsoft.com/office/drawing/2010/main" xmlns="" w="9525">
                   <a:solidFill>
                     <a:srgbClr val="000000"/>
                   </a:solidFill>
@@ -2885,7 +2885,7 @@
             </a:ln>
             <a:extLst>
               <a:ext uri="{91240B29-F687-4f45-9708-019B960494DF}">
-                <a14:hiddenLine xmlns="" xmlns:a14="http://schemas.microsoft.com/office/drawing/2010/main" w="9525">
+                <a14:hiddenLine xmlns:a14="http://schemas.microsoft.com/office/drawing/2010/main" xmlns="" w="9525">
                   <a:solidFill>
                     <a:srgbClr val="000000"/>
                   </a:solidFill>
@@ -2947,7 +2947,7 @@
             </a:ln>
             <a:extLst>
               <a:ext uri="{91240B29-F687-4f45-9708-019B960494DF}">
-                <a14:hiddenLine xmlns="" xmlns:a14="http://schemas.microsoft.com/office/drawing/2010/main" w="9525">
+                <a14:hiddenLine xmlns:a14="http://schemas.microsoft.com/office/drawing/2010/main" xmlns="" w="9525">
                   <a:solidFill>
                     <a:srgbClr val="000000"/>
                   </a:solidFill>
@@ -3009,7 +3009,7 @@
             </a:ln>
             <a:extLst>
               <a:ext uri="{91240B29-F687-4f45-9708-019B960494DF}">
-                <a14:hiddenLine xmlns="" xmlns:a14="http://schemas.microsoft.com/office/drawing/2010/main" w="9525">
+                <a14:hiddenLine xmlns:a14="http://schemas.microsoft.com/office/drawing/2010/main" xmlns="" w="9525">
                   <a:solidFill>
                     <a:srgbClr val="000000"/>
                   </a:solidFill>
@@ -3099,7 +3099,7 @@
             </a:ln>
             <a:extLst>
               <a:ext uri="{91240B29-F687-4f45-9708-019B960494DF}">
-                <a14:hiddenLine xmlns="" xmlns:a14="http://schemas.microsoft.com/office/drawing/2010/main" w="9525">
+                <a14:hiddenLine xmlns:a14="http://schemas.microsoft.com/office/drawing/2010/main" xmlns="" w="9525">
                   <a:solidFill>
                     <a:srgbClr val="000000"/>
                   </a:solidFill>
@@ -3167,7 +3167,7 @@
             </a:ln>
             <a:extLst>
               <a:ext uri="{91240B29-F687-4f45-9708-019B960494DF}">
-                <a14:hiddenLine xmlns="" xmlns:a14="http://schemas.microsoft.com/office/drawing/2010/main" w="9525">
+                <a14:hiddenLine xmlns:a14="http://schemas.microsoft.com/office/drawing/2010/main" xmlns="" w="9525">
                   <a:solidFill>
                     <a:srgbClr val="000000"/>
                   </a:solidFill>
@@ -3229,7 +3229,7 @@
             </a:ln>
             <a:extLst>
               <a:ext uri="{91240B29-F687-4f45-9708-019B960494DF}">
-                <a14:hiddenLine xmlns="" xmlns:a14="http://schemas.microsoft.com/office/drawing/2010/main" w="9525">
+                <a14:hiddenLine xmlns:a14="http://schemas.microsoft.com/office/drawing/2010/main" xmlns="" w="9525">
                   <a:solidFill>
                     <a:srgbClr val="000000"/>
                   </a:solidFill>
@@ -3319,7 +3319,7 @@
             </a:ln>
             <a:extLst>
               <a:ext uri="{91240B29-F687-4f45-9708-019B960494DF}">
-                <a14:hiddenLine xmlns="" xmlns:a14="http://schemas.microsoft.com/office/drawing/2010/main" w="9525">
+                <a14:hiddenLine xmlns:a14="http://schemas.microsoft.com/office/drawing/2010/main" xmlns="" w="9525">
                   <a:solidFill>
                     <a:srgbClr val="000000"/>
                   </a:solidFill>
@@ -3381,7 +3381,7 @@
             </a:ln>
             <a:extLst>
               <a:ext uri="{91240B29-F687-4f45-9708-019B960494DF}">
-                <a14:hiddenLine xmlns="" xmlns:a14="http://schemas.microsoft.com/office/drawing/2010/main" w="9525">
+                <a14:hiddenLine xmlns:a14="http://schemas.microsoft.com/office/drawing/2010/main" xmlns="" w="9525">
                   <a:solidFill>
                     <a:srgbClr val="000000"/>
                   </a:solidFill>
@@ -3471,7 +3471,7 @@
             </a:ln>
             <a:extLst>
               <a:ext uri="{91240B29-F687-4f45-9708-019B960494DF}">
-                <a14:hiddenLine xmlns="" xmlns:a14="http://schemas.microsoft.com/office/drawing/2010/main" w="9525">
+                <a14:hiddenLine xmlns:a14="http://schemas.microsoft.com/office/drawing/2010/main" xmlns="" w="9525">
                   <a:solidFill>
                     <a:srgbClr val="000000"/>
                   </a:solidFill>
@@ -3533,7 +3533,7 @@
             </a:ln>
             <a:extLst>
               <a:ext uri="{91240B29-F687-4f45-9708-019B960494DF}">
-                <a14:hiddenLine xmlns="" xmlns:a14="http://schemas.microsoft.com/office/drawing/2010/main" w="9525">
+                <a14:hiddenLine xmlns:a14="http://schemas.microsoft.com/office/drawing/2010/main" xmlns="" w="9525">
                   <a:solidFill>
                     <a:srgbClr val="000000"/>
                   </a:solidFill>
@@ -3623,7 +3623,7 @@
             </a:ln>
             <a:extLst>
               <a:ext uri="{91240B29-F687-4f45-9708-019B960494DF}">
-                <a14:hiddenLine xmlns="" xmlns:a14="http://schemas.microsoft.com/office/drawing/2010/main" w="9525">
+                <a14:hiddenLine xmlns:a14="http://schemas.microsoft.com/office/drawing/2010/main" xmlns="" w="9525">
                   <a:solidFill>
                     <a:srgbClr val="000000"/>
                   </a:solidFill>
@@ -3657,7 +3657,7 @@
             </a:ln>
             <a:extLst>
               <a:ext uri="{91240B29-F687-4f45-9708-019B960494DF}">
-                <a14:hiddenLine xmlns="" xmlns:a14="http://schemas.microsoft.com/office/drawing/2010/main" w="9525">
+                <a14:hiddenLine xmlns:a14="http://schemas.microsoft.com/office/drawing/2010/main" xmlns="" w="9525">
                   <a:solidFill>
                     <a:srgbClr val="000000"/>
                   </a:solidFill>
@@ -3722,7 +3722,7 @@
             </a:ln>
             <a:extLst>
               <a:ext uri="{91240B29-F687-4f45-9708-019B960494DF}">
-                <a14:hiddenLine xmlns="" xmlns:a14="http://schemas.microsoft.com/office/drawing/2010/main" w="9525">
+                <a14:hiddenLine xmlns:a14="http://schemas.microsoft.com/office/drawing/2010/main" xmlns="" w="9525">
                   <a:solidFill>
                     <a:srgbClr val="000000"/>
                   </a:solidFill>
@@ -3812,7 +3812,7 @@
             </a:ln>
             <a:extLst>
               <a:ext uri="{91240B29-F687-4f45-9708-019B960494DF}">
-                <a14:hiddenLine xmlns="" xmlns:a14="http://schemas.microsoft.com/office/drawing/2010/main" w="9525">
+                <a14:hiddenLine xmlns:a14="http://schemas.microsoft.com/office/drawing/2010/main" xmlns="" w="9525">
                   <a:solidFill>
                     <a:srgbClr val="000000"/>
                   </a:solidFill>
@@ -3874,7 +3874,7 @@
             </a:ln>
             <a:extLst>
               <a:ext uri="{91240B29-F687-4f45-9708-019B960494DF}">
-                <a14:hiddenLine xmlns="" xmlns:a14="http://schemas.microsoft.com/office/drawing/2010/main" w="9525">
+                <a14:hiddenLine xmlns:a14="http://schemas.microsoft.com/office/drawing/2010/main" xmlns="" w="9525">
                   <a:solidFill>
                     <a:srgbClr val="000000"/>
                   </a:solidFill>
@@ -3964,7 +3964,7 @@
             </a:ln>
             <a:extLst>
               <a:ext uri="{91240B29-F687-4f45-9708-019B960494DF}">
-                <a14:hiddenLine xmlns="" xmlns:a14="http://schemas.microsoft.com/office/drawing/2010/main" w="9525">
+                <a14:hiddenLine xmlns:a14="http://schemas.microsoft.com/office/drawing/2010/main" xmlns="" w="9525">
                   <a:solidFill>
                     <a:srgbClr val="000000"/>
                   </a:solidFill>
@@ -4054,7 +4054,7 @@
             </a:ln>
             <a:extLst>
               <a:ext uri="{91240B29-F687-4f45-9708-019B960494DF}">
-                <a14:hiddenLine xmlns="" xmlns:a14="http://schemas.microsoft.com/office/drawing/2010/main" w="9525">
+                <a14:hiddenLine xmlns:a14="http://schemas.microsoft.com/office/drawing/2010/main" xmlns="" w="9525">
                   <a:solidFill>
                     <a:srgbClr val="000000"/>
                   </a:solidFill>
@@ -4119,7 +4119,7 @@
             </a:ln>
             <a:extLst>
               <a:ext uri="{91240B29-F687-4f45-9708-019B960494DF}">
-                <a14:hiddenLine xmlns="" xmlns:a14="http://schemas.microsoft.com/office/drawing/2010/main" w="9525">
+                <a14:hiddenLine xmlns:a14="http://schemas.microsoft.com/office/drawing/2010/main" xmlns="" w="9525">
                   <a:solidFill>
                     <a:srgbClr val="000000"/>
                   </a:solidFill>
@@ -4181,7 +4181,7 @@
             </a:ln>
             <a:extLst>
               <a:ext uri="{91240B29-F687-4f45-9708-019B960494DF}">
-                <a14:hiddenLine xmlns="" xmlns:a14="http://schemas.microsoft.com/office/drawing/2010/main" w="9525">
+                <a14:hiddenLine xmlns:a14="http://schemas.microsoft.com/office/drawing/2010/main" xmlns="" w="9525">
                   <a:solidFill>
                     <a:srgbClr val="000000"/>
                   </a:solidFill>
@@ -4271,7 +4271,7 @@
             </a:ln>
             <a:extLst>
               <a:ext uri="{91240B29-F687-4f45-9708-019B960494DF}">
-                <a14:hiddenLine xmlns="" xmlns:a14="http://schemas.microsoft.com/office/drawing/2010/main" w="9525">
+                <a14:hiddenLine xmlns:a14="http://schemas.microsoft.com/office/drawing/2010/main" xmlns="" w="9525">
                   <a:solidFill>
                     <a:srgbClr val="000000"/>
                   </a:solidFill>
@@ -4361,7 +4361,7 @@
             </a:ln>
             <a:extLst>
               <a:ext uri="{91240B29-F687-4f45-9708-019B960494DF}">
-                <a14:hiddenLine xmlns="" xmlns:a14="http://schemas.microsoft.com/office/drawing/2010/main" w="9525">
+                <a14:hiddenLine xmlns:a14="http://schemas.microsoft.com/office/drawing/2010/main" xmlns="" w="9525">
                   <a:solidFill>
                     <a:srgbClr val="000000"/>
                   </a:solidFill>
@@ -4423,7 +4423,7 @@
             </a:ln>
             <a:extLst>
               <a:ext uri="{91240B29-F687-4f45-9708-019B960494DF}">
-                <a14:hiddenLine xmlns="" xmlns:a14="http://schemas.microsoft.com/office/drawing/2010/main" w="9525">
+                <a14:hiddenLine xmlns:a14="http://schemas.microsoft.com/office/drawing/2010/main" xmlns="" w="9525">
                   <a:solidFill>
                     <a:srgbClr val="000000"/>
                   </a:solidFill>
@@ -4543,7 +4543,7 @@
             </a:ln>
             <a:extLst>
               <a:ext uri="{91240B29-F687-4f45-9708-019B960494DF}">
-                <a14:hiddenLine xmlns="" xmlns:a14="http://schemas.microsoft.com/office/drawing/2010/main" w="9525">
+                <a14:hiddenLine xmlns:a14="http://schemas.microsoft.com/office/drawing/2010/main" xmlns="" w="9525">
                   <a:solidFill>
                     <a:srgbClr val="000000"/>
                   </a:solidFill>
@@ -4611,7 +4611,7 @@
             </a:ln>
             <a:extLst>
               <a:ext uri="{91240B29-F687-4f45-9708-019B960494DF}">
-                <a14:hiddenLine xmlns="" xmlns:a14="http://schemas.microsoft.com/office/drawing/2010/main" w="9525">
+                <a14:hiddenLine xmlns:a14="http://schemas.microsoft.com/office/drawing/2010/main" xmlns="" w="9525">
                   <a:solidFill>
                     <a:srgbClr val="000000"/>
                   </a:solidFill>
@@ -4701,7 +4701,7 @@
             </a:ln>
             <a:extLst>
               <a:ext uri="{91240B29-F687-4f45-9708-019B960494DF}">
-                <a14:hiddenLine xmlns="" xmlns:a14="http://schemas.microsoft.com/office/drawing/2010/main" w="9525">
+                <a14:hiddenLine xmlns:a14="http://schemas.microsoft.com/office/drawing/2010/main" xmlns="" w="9525">
                   <a:solidFill>
                     <a:srgbClr val="000000"/>
                   </a:solidFill>
@@ -4841,7 +4841,7 @@
           <a:p>
             <a:fld id="{02CD26A6-15A2-B449-9218-85BDE57EBA42}" type="datetime1">
               <a:rPr lang="en-US" smtClean="0"/>
-              <a:t>10/7/25</a:t>
+              <a:t>10/20/25</a:t>
             </a:fld>
             <a:endParaRPr lang="en-US"/>
           </a:p>
@@ -5108,7 +5108,7 @@
           <a:p>
             <a:fld id="{86196231-FA13-E844-B7A9-39406EF14982}" type="datetime1">
               <a:rPr lang="en-US" smtClean="0"/>
-              <a:t>10/7/25</a:t>
+              <a:t>10/20/25</a:t>
             </a:fld>
             <a:endParaRPr lang="en-US"/>
           </a:p>
@@ -5304,7 +5304,7 @@
           <a:p>
             <a:fld id="{F8A175EF-9ECA-B54E-B5F1-E9A7ECD1A9A7}" type="datetime1">
               <a:rPr lang="en-US" smtClean="0"/>
-              <a:t>10/7/25</a:t>
+              <a:t>10/20/25</a:t>
             </a:fld>
             <a:endParaRPr lang="en-US"/>
           </a:p>
@@ -5567,7 +5567,7 @@
           <a:p>
             <a:fld id="{500354CC-C6D3-2343-B23F-7899CBC1D23F}" type="datetime1">
               <a:rPr lang="en-US" smtClean="0"/>
-              <a:t>10/7/25</a:t>
+              <a:t>10/20/25</a:t>
             </a:fld>
             <a:endParaRPr lang="en-US"/>
           </a:p>
@@ -6001,7 +6001,7 @@
           <a:p>
             <a:fld id="{91A73A3F-0738-3A4B-9460-155F524D47D2}" type="datetime1">
               <a:rPr lang="en-US" smtClean="0"/>
-              <a:t>10/7/25</a:t>
+              <a:t>10/20/25</a:t>
             </a:fld>
             <a:endParaRPr lang="en-US"/>
           </a:p>
@@ -6547,7 +6547,7 @@
           <a:p>
             <a:fld id="{7377266C-1F81-3F4F-9E28-AFBFE5E15350}" type="datetime1">
               <a:rPr lang="en-US" smtClean="0"/>
-              <a:t>10/7/25</a:t>
+              <a:t>10/20/25</a:t>
             </a:fld>
             <a:endParaRPr lang="en-US"/>
           </a:p>
@@ -7267,7 +7267,7 @@
           <a:p>
             <a:fld id="{9025C51A-5B64-744E-84CD-F53E0FA92537}" type="datetime1">
               <a:rPr lang="en-US" smtClean="0"/>
-              <a:t>10/7/25</a:t>
+              <a:t>10/20/25</a:t>
             </a:fld>
             <a:endParaRPr lang="en-US"/>
           </a:p>
@@ -7437,7 +7437,7 @@
           <a:p>
             <a:fld id="{4DCA85F3-FE26-6F4E-A395-CAB36C7DE96B}" type="datetime1">
               <a:rPr lang="en-US" smtClean="0"/>
-              <a:t>10/7/25</a:t>
+              <a:t>10/20/25</a:t>
             </a:fld>
             <a:endParaRPr lang="en-US"/>
           </a:p>
@@ -7617,7 +7617,7 @@
           <a:p>
             <a:fld id="{93668D8C-2310-1F49-8704-ED0A872C1D76}" type="datetime1">
               <a:rPr lang="en-US" smtClean="0"/>
-              <a:t>10/7/25</a:t>
+              <a:t>10/20/25</a:t>
             </a:fld>
             <a:endParaRPr lang="en-US"/>
           </a:p>
@@ -7787,7 +7787,7 @@
           <a:p>
             <a:fld id="{1AE8176D-7614-0047-BF7D-0D7213955B60}" type="datetime1">
               <a:rPr lang="en-US" smtClean="0"/>
-              <a:t>10/7/25</a:t>
+              <a:t>10/20/25</a:t>
             </a:fld>
             <a:endParaRPr lang="en-US"/>
           </a:p>
@@ -8037,7 +8037,7 @@
           <a:p>
             <a:fld id="{BBD3DFC6-3AF6-5F40-9115-61971812DEC9}" type="datetime1">
               <a:rPr lang="en-US" smtClean="0"/>
-              <a:t>10/7/25</a:t>
+              <a:t>10/20/25</a:t>
             </a:fld>
             <a:endParaRPr lang="en-US"/>
           </a:p>
@@ -8269,7 +8269,7 @@
           <a:p>
             <a:fld id="{B9ED4E90-35C8-E14C-B1F1-9C55AFA0B23D}" type="datetime1">
               <a:rPr lang="en-US" smtClean="0"/>
-              <a:t>10/7/25</a:t>
+              <a:t>10/20/25</a:t>
             </a:fld>
             <a:endParaRPr lang="en-US"/>
           </a:p>
@@ -8655,7 +8655,7 @@
           <a:p>
             <a:fld id="{E46EEFC5-06EE-864E-8985-D4A3572367C6}" type="datetime1">
               <a:rPr lang="en-US" smtClean="0"/>
-              <a:t>10/7/25</a:t>
+              <a:t>10/20/25</a:t>
             </a:fld>
             <a:endParaRPr lang="en-US"/>
           </a:p>
@@ -8778,7 +8778,7 @@
           <a:p>
             <a:fld id="{8AFAEA8D-371E-E449-A3CD-D4BC4ACAE00B}" type="datetime1">
               <a:rPr lang="en-US" smtClean="0"/>
-              <a:t>10/7/25</a:t>
+              <a:t>10/20/25</a:t>
             </a:fld>
             <a:endParaRPr lang="en-US"/>
           </a:p>
@@ -8873,7 +8873,7 @@
           <a:p>
             <a:fld id="{995DCDE8-2B30-9C4B-9524-B7B866851B77}" type="datetime1">
               <a:rPr lang="en-US" smtClean="0"/>
-              <a:t>10/7/25</a:t>
+              <a:t>10/20/25</a:t>
             </a:fld>
             <a:endParaRPr lang="en-US"/>
           </a:p>
@@ -9122,7 +9122,7 @@
           <a:p>
             <a:fld id="{29D79D64-9F73-834A-BB33-5400411F3A00}" type="datetime1">
               <a:rPr lang="en-US" smtClean="0"/>
-              <a:t>10/7/25</a:t>
+              <a:t>10/20/25</a:t>
             </a:fld>
             <a:endParaRPr lang="en-US"/>
           </a:p>
@@ -9407,7 +9407,7 @@
           <a:p>
             <a:fld id="{9A1452D3-087A-BD44-B9C8-6816C7755A34}" type="datetime1">
               <a:rPr lang="en-US" smtClean="0"/>
-              <a:t>10/7/25</a:t>
+              <a:t>10/20/25</a:t>
             </a:fld>
             <a:endParaRPr lang="en-US"/>
           </a:p>
@@ -9530,7 +9530,7 @@
           <a:noFill/>
           <a:extLst>
             <a:ext uri="{909E8E84-426E-40dd-AFC4-6F175D3DCCD1}">
-              <a14:hiddenFill xmlns="" xmlns:a14="http://schemas.microsoft.com/office/drawing/2010/main">
+              <a14:hiddenFill xmlns:a14="http://schemas.microsoft.com/office/drawing/2010/main" xmlns="">
                 <a:solidFill>
                   <a:srgbClr val="FFFFFF"/>
                 </a:solidFill>
@@ -9604,7 +9604,7 @@
               </a:ln>
               <a:extLst>
                 <a:ext uri="{91240B29-F687-4f45-9708-019B960494DF}">
-                  <a14:hiddenLine xmlns="" xmlns:a14="http://schemas.microsoft.com/office/drawing/2010/main" w="9525">
+                  <a14:hiddenLine xmlns:a14="http://schemas.microsoft.com/office/drawing/2010/main" xmlns="" w="9525">
                     <a:solidFill>
                       <a:srgbClr val="000000"/>
                     </a:solidFill>
@@ -9694,7 +9694,7 @@
               </a:ln>
               <a:extLst>
                 <a:ext uri="{91240B29-F687-4f45-9708-019B960494DF}">
-                  <a14:hiddenLine xmlns="" xmlns:a14="http://schemas.microsoft.com/office/drawing/2010/main" w="9525">
+                  <a14:hiddenLine xmlns:a14="http://schemas.microsoft.com/office/drawing/2010/main" xmlns="" w="9525">
                     <a:solidFill>
                       <a:srgbClr val="000000"/>
                     </a:solidFill>
@@ -9784,7 +9784,7 @@
               </a:ln>
               <a:extLst>
                 <a:ext uri="{91240B29-F687-4f45-9708-019B960494DF}">
-                  <a14:hiddenLine xmlns="" xmlns:a14="http://schemas.microsoft.com/office/drawing/2010/main" w="9525">
+                  <a14:hiddenLine xmlns:a14="http://schemas.microsoft.com/office/drawing/2010/main" xmlns="" w="9525">
                     <a:solidFill>
                       <a:srgbClr val="000000"/>
                     </a:solidFill>
@@ -9846,7 +9846,7 @@
               </a:ln>
               <a:extLst>
                 <a:ext uri="{91240B29-F687-4f45-9708-019B960494DF}">
-                  <a14:hiddenLine xmlns="" xmlns:a14="http://schemas.microsoft.com/office/drawing/2010/main" w="9525">
+                  <a14:hiddenLine xmlns:a14="http://schemas.microsoft.com/office/drawing/2010/main" xmlns="" w="9525">
                     <a:solidFill>
                       <a:srgbClr val="000000"/>
                     </a:solidFill>
@@ -9936,7 +9936,7 @@
               </a:ln>
               <a:extLst>
                 <a:ext uri="{91240B29-F687-4f45-9708-019B960494DF}">
-                  <a14:hiddenLine xmlns="" xmlns:a14="http://schemas.microsoft.com/office/drawing/2010/main" w="9525">
+                  <a14:hiddenLine xmlns:a14="http://schemas.microsoft.com/office/drawing/2010/main" xmlns="" w="9525">
                     <a:solidFill>
                       <a:srgbClr val="000000"/>
                     </a:solidFill>
@@ -9998,7 +9998,7 @@
               </a:ln>
               <a:extLst>
                 <a:ext uri="{91240B29-F687-4f45-9708-019B960494DF}">
-                  <a14:hiddenLine xmlns="" xmlns:a14="http://schemas.microsoft.com/office/drawing/2010/main" w="9525">
+                  <a14:hiddenLine xmlns:a14="http://schemas.microsoft.com/office/drawing/2010/main" xmlns="" w="9525">
                     <a:solidFill>
                       <a:srgbClr val="000000"/>
                     </a:solidFill>
@@ -10060,7 +10060,7 @@
               </a:ln>
               <a:extLst>
                 <a:ext uri="{91240B29-F687-4f45-9708-019B960494DF}">
-                  <a14:hiddenLine xmlns="" xmlns:a14="http://schemas.microsoft.com/office/drawing/2010/main" w="9525">
+                  <a14:hiddenLine xmlns:a14="http://schemas.microsoft.com/office/drawing/2010/main" xmlns="" w="9525">
                     <a:solidFill>
                       <a:srgbClr val="000000"/>
                     </a:solidFill>
@@ -10150,7 +10150,7 @@
               </a:ln>
               <a:extLst>
                 <a:ext uri="{91240B29-F687-4f45-9708-019B960494DF}">
-                  <a14:hiddenLine xmlns="" xmlns:a14="http://schemas.microsoft.com/office/drawing/2010/main" w="9525">
+                  <a14:hiddenLine xmlns:a14="http://schemas.microsoft.com/office/drawing/2010/main" xmlns="" w="9525">
                     <a:solidFill>
                       <a:srgbClr val="000000"/>
                     </a:solidFill>
@@ -10240,7 +10240,7 @@
               </a:ln>
               <a:extLst>
                 <a:ext uri="{91240B29-F687-4f45-9708-019B960494DF}">
-                  <a14:hiddenLine xmlns="" xmlns:a14="http://schemas.microsoft.com/office/drawing/2010/main" w="9525">
+                  <a14:hiddenLine xmlns:a14="http://schemas.microsoft.com/office/drawing/2010/main" xmlns="" w="9525">
                     <a:solidFill>
                       <a:srgbClr val="000000"/>
                     </a:solidFill>
@@ -10302,7 +10302,7 @@
               </a:ln>
               <a:extLst>
                 <a:ext uri="{91240B29-F687-4f45-9708-019B960494DF}">
-                  <a14:hiddenLine xmlns="" xmlns:a14="http://schemas.microsoft.com/office/drawing/2010/main" w="9525">
+                  <a14:hiddenLine xmlns:a14="http://schemas.microsoft.com/office/drawing/2010/main" xmlns="" w="9525">
                     <a:solidFill>
                       <a:srgbClr val="000000"/>
                     </a:solidFill>
@@ -10412,7 +10412,7 @@
               </a:ln>
               <a:extLst>
                 <a:ext uri="{91240B29-F687-4f45-9708-019B960494DF}">
-                  <a14:hiddenLine xmlns="" xmlns:a14="http://schemas.microsoft.com/office/drawing/2010/main" w="9525">
+                  <a14:hiddenLine xmlns:a14="http://schemas.microsoft.com/office/drawing/2010/main" xmlns="" w="9525">
                     <a:solidFill>
                       <a:srgbClr val="000000"/>
                     </a:solidFill>
@@ -10496,7 +10496,7 @@
               </a:ln>
               <a:extLst>
                 <a:ext uri="{91240B29-F687-4f45-9708-019B960494DF}">
-                  <a14:hiddenLine xmlns="" xmlns:a14="http://schemas.microsoft.com/office/drawing/2010/main" w="9525">
+                  <a14:hiddenLine xmlns:a14="http://schemas.microsoft.com/office/drawing/2010/main" xmlns="" w="9525">
                     <a:solidFill>
                       <a:srgbClr val="000000"/>
                     </a:solidFill>
@@ -10558,7 +10558,7 @@
               </a:ln>
               <a:extLst>
                 <a:ext uri="{91240B29-F687-4f45-9708-019B960494DF}">
-                  <a14:hiddenLine xmlns="" xmlns:a14="http://schemas.microsoft.com/office/drawing/2010/main" w="9525">
+                  <a14:hiddenLine xmlns:a14="http://schemas.microsoft.com/office/drawing/2010/main" xmlns="" w="9525">
                     <a:solidFill>
                       <a:srgbClr val="000000"/>
                     </a:solidFill>
@@ -10620,7 +10620,7 @@
               </a:ln>
               <a:extLst>
                 <a:ext uri="{91240B29-F687-4f45-9708-019B960494DF}">
-                  <a14:hiddenLine xmlns="" xmlns:a14="http://schemas.microsoft.com/office/drawing/2010/main" w="9525">
+                  <a14:hiddenLine xmlns:a14="http://schemas.microsoft.com/office/drawing/2010/main" xmlns="" w="9525">
                     <a:solidFill>
                       <a:srgbClr val="000000"/>
                     </a:solidFill>
@@ -10710,7 +10710,7 @@
               </a:ln>
               <a:extLst>
                 <a:ext uri="{91240B29-F687-4f45-9708-019B960494DF}">
-                  <a14:hiddenLine xmlns="" xmlns:a14="http://schemas.microsoft.com/office/drawing/2010/main" w="9525">
+                  <a14:hiddenLine xmlns:a14="http://schemas.microsoft.com/office/drawing/2010/main" xmlns="" w="9525">
                     <a:solidFill>
                       <a:srgbClr val="000000"/>
                     </a:solidFill>
@@ -10744,7 +10744,7 @@
               </a:ln>
               <a:extLst>
                 <a:ext uri="{91240B29-F687-4f45-9708-019B960494DF}">
-                  <a14:hiddenLine xmlns="" xmlns:a14="http://schemas.microsoft.com/office/drawing/2010/main" w="9525">
+                  <a14:hiddenLine xmlns:a14="http://schemas.microsoft.com/office/drawing/2010/main" xmlns="" w="9525">
                     <a:solidFill>
                       <a:srgbClr val="000000"/>
                     </a:solidFill>
@@ -10809,7 +10809,7 @@
               </a:ln>
               <a:extLst>
                 <a:ext uri="{91240B29-F687-4f45-9708-019B960494DF}">
-                  <a14:hiddenLine xmlns="" xmlns:a14="http://schemas.microsoft.com/office/drawing/2010/main" w="9525">
+                  <a14:hiddenLine xmlns:a14="http://schemas.microsoft.com/office/drawing/2010/main" xmlns="" w="9525">
                     <a:solidFill>
                       <a:srgbClr val="000000"/>
                     </a:solidFill>
@@ -10899,7 +10899,7 @@
               </a:ln>
               <a:extLst>
                 <a:ext uri="{91240B29-F687-4f45-9708-019B960494DF}">
-                  <a14:hiddenLine xmlns="" xmlns:a14="http://schemas.microsoft.com/office/drawing/2010/main" w="9525">
+                  <a14:hiddenLine xmlns:a14="http://schemas.microsoft.com/office/drawing/2010/main" xmlns="" w="9525">
                     <a:solidFill>
                       <a:srgbClr val="000000"/>
                     </a:solidFill>
@@ -10961,7 +10961,7 @@
               </a:ln>
               <a:extLst>
                 <a:ext uri="{91240B29-F687-4f45-9708-019B960494DF}">
-                  <a14:hiddenLine xmlns="" xmlns:a14="http://schemas.microsoft.com/office/drawing/2010/main" w="9525">
+                  <a14:hiddenLine xmlns:a14="http://schemas.microsoft.com/office/drawing/2010/main" xmlns="" w="9525">
                     <a:solidFill>
                       <a:srgbClr val="000000"/>
                     </a:solidFill>
@@ -11051,7 +11051,7 @@
               </a:ln>
               <a:extLst>
                 <a:ext uri="{91240B29-F687-4f45-9708-019B960494DF}">
-                  <a14:hiddenLine xmlns="" xmlns:a14="http://schemas.microsoft.com/office/drawing/2010/main" w="9525">
+                  <a14:hiddenLine xmlns:a14="http://schemas.microsoft.com/office/drawing/2010/main" xmlns="" w="9525">
                     <a:solidFill>
                       <a:srgbClr val="000000"/>
                     </a:solidFill>
@@ -11116,7 +11116,7 @@
               </a:ln>
               <a:extLst>
                 <a:ext uri="{91240B29-F687-4f45-9708-019B960494DF}">
-                  <a14:hiddenLine xmlns="" xmlns:a14="http://schemas.microsoft.com/office/drawing/2010/main" w="9525">
+                  <a14:hiddenLine xmlns:a14="http://schemas.microsoft.com/office/drawing/2010/main" xmlns="" w="9525">
                     <a:solidFill>
                       <a:srgbClr val="000000"/>
                     </a:solidFill>
@@ -11178,7 +11178,7 @@
               </a:ln>
               <a:extLst>
                 <a:ext uri="{91240B29-F687-4f45-9708-019B960494DF}">
-                  <a14:hiddenLine xmlns="" xmlns:a14="http://schemas.microsoft.com/office/drawing/2010/main" w="9525">
+                  <a14:hiddenLine xmlns:a14="http://schemas.microsoft.com/office/drawing/2010/main" xmlns="" w="9525">
                     <a:solidFill>
                       <a:srgbClr val="000000"/>
                     </a:solidFill>
@@ -11268,7 +11268,7 @@
               </a:ln>
               <a:extLst>
                 <a:ext uri="{91240B29-F687-4f45-9708-019B960494DF}">
-                  <a14:hiddenLine xmlns="" xmlns:a14="http://schemas.microsoft.com/office/drawing/2010/main" w="9525">
+                  <a14:hiddenLine xmlns:a14="http://schemas.microsoft.com/office/drawing/2010/main" xmlns="" w="9525">
                     <a:solidFill>
                       <a:srgbClr val="000000"/>
                     </a:solidFill>
@@ -11358,7 +11358,7 @@
               </a:ln>
               <a:extLst>
                 <a:ext uri="{91240B29-F687-4f45-9708-019B960494DF}">
-                  <a14:hiddenLine xmlns="" xmlns:a14="http://schemas.microsoft.com/office/drawing/2010/main" w="9525">
+                  <a14:hiddenLine xmlns:a14="http://schemas.microsoft.com/office/drawing/2010/main" xmlns="" w="9525">
                     <a:solidFill>
                       <a:srgbClr val="000000"/>
                     </a:solidFill>
@@ -11423,7 +11423,7 @@
               </a:ln>
               <a:extLst>
                 <a:ext uri="{91240B29-F687-4f45-9708-019B960494DF}">
-                  <a14:hiddenLine xmlns="" xmlns:a14="http://schemas.microsoft.com/office/drawing/2010/main" w="9525">
+                  <a14:hiddenLine xmlns:a14="http://schemas.microsoft.com/office/drawing/2010/main" xmlns="" w="9525">
                     <a:solidFill>
                       <a:srgbClr val="000000"/>
                     </a:solidFill>
@@ -11543,7 +11543,7 @@
               </a:ln>
               <a:extLst>
                 <a:ext uri="{91240B29-F687-4f45-9708-019B960494DF}">
-                  <a14:hiddenLine xmlns="" xmlns:a14="http://schemas.microsoft.com/office/drawing/2010/main" w="9525">
+                  <a14:hiddenLine xmlns:a14="http://schemas.microsoft.com/office/drawing/2010/main" xmlns="" w="9525">
                     <a:solidFill>
                       <a:srgbClr val="000000"/>
                     </a:solidFill>
@@ -11624,7 +11624,7 @@
               </a:ln>
               <a:extLst>
                 <a:ext uri="{91240B29-F687-4f45-9708-019B960494DF}">
-                  <a14:hiddenLine xmlns="" xmlns:a14="http://schemas.microsoft.com/office/drawing/2010/main" w="9525">
+                  <a14:hiddenLine xmlns:a14="http://schemas.microsoft.com/office/drawing/2010/main" xmlns="" w="9525">
                     <a:solidFill>
                       <a:srgbClr val="000000"/>
                     </a:solidFill>
@@ -11739,7 +11739,7 @@
               </a:ln>
               <a:extLst>
                 <a:ext uri="{91240B29-F687-4f45-9708-019B960494DF}">
-                  <a14:hiddenLine xmlns="" xmlns:a14="http://schemas.microsoft.com/office/drawing/2010/main" w="9525">
+                  <a14:hiddenLine xmlns:a14="http://schemas.microsoft.com/office/drawing/2010/main" xmlns="" w="9525">
                     <a:solidFill>
                       <a:srgbClr val="000000"/>
                     </a:solidFill>
@@ -11829,7 +11829,7 @@
               </a:ln>
               <a:extLst>
                 <a:ext uri="{91240B29-F687-4f45-9708-019B960494DF}">
-                  <a14:hiddenLine xmlns="" xmlns:a14="http://schemas.microsoft.com/office/drawing/2010/main" w="9525">
+                  <a14:hiddenLine xmlns:a14="http://schemas.microsoft.com/office/drawing/2010/main" xmlns="" w="9525">
                     <a:solidFill>
                       <a:srgbClr val="000000"/>
                     </a:solidFill>
@@ -11894,7 +11894,7 @@
               </a:ln>
               <a:extLst>
                 <a:ext uri="{91240B29-F687-4f45-9708-019B960494DF}">
-                  <a14:hiddenLine xmlns="" xmlns:a14="http://schemas.microsoft.com/office/drawing/2010/main" w="9525">
+                  <a14:hiddenLine xmlns:a14="http://schemas.microsoft.com/office/drawing/2010/main" xmlns="" w="9525">
                     <a:solidFill>
                       <a:srgbClr val="000000"/>
                     </a:solidFill>
@@ -11984,7 +11984,7 @@
               </a:ln>
               <a:extLst>
                 <a:ext uri="{91240B29-F687-4f45-9708-019B960494DF}">
-                  <a14:hiddenLine xmlns="" xmlns:a14="http://schemas.microsoft.com/office/drawing/2010/main" w="9525">
+                  <a14:hiddenLine xmlns:a14="http://schemas.microsoft.com/office/drawing/2010/main" xmlns="" w="9525">
                     <a:solidFill>
                       <a:srgbClr val="000000"/>
                     </a:solidFill>
@@ -12052,7 +12052,7 @@
               </a:ln>
               <a:extLst>
                 <a:ext uri="{91240B29-F687-4f45-9708-019B960494DF}">
-                  <a14:hiddenLine xmlns="" xmlns:a14="http://schemas.microsoft.com/office/drawing/2010/main" w="9525">
+                  <a14:hiddenLine xmlns:a14="http://schemas.microsoft.com/office/drawing/2010/main" xmlns="" w="9525">
                     <a:solidFill>
                       <a:srgbClr val="000000"/>
                     </a:solidFill>
@@ -12142,7 +12142,7 @@
               </a:ln>
               <a:extLst>
                 <a:ext uri="{91240B29-F687-4f45-9708-019B960494DF}">
-                  <a14:hiddenLine xmlns="" xmlns:a14="http://schemas.microsoft.com/office/drawing/2010/main" w="9525">
+                  <a14:hiddenLine xmlns:a14="http://schemas.microsoft.com/office/drawing/2010/main" xmlns="" w="9525">
                     <a:solidFill>
                       <a:srgbClr val="000000"/>
                     </a:solidFill>
@@ -12210,7 +12210,7 @@
               </a:ln>
               <a:extLst>
                 <a:ext uri="{91240B29-F687-4f45-9708-019B960494DF}">
-                  <a14:hiddenLine xmlns="" xmlns:a14="http://schemas.microsoft.com/office/drawing/2010/main" w="9525">
+                  <a14:hiddenLine xmlns:a14="http://schemas.microsoft.com/office/drawing/2010/main" xmlns="" w="9525">
                     <a:solidFill>
                       <a:srgbClr val="000000"/>
                     </a:solidFill>
@@ -12300,7 +12300,7 @@
               </a:ln>
               <a:extLst>
                 <a:ext uri="{91240B29-F687-4f45-9708-019B960494DF}">
-                  <a14:hiddenLine xmlns="" xmlns:a14="http://schemas.microsoft.com/office/drawing/2010/main" w="9525">
+                  <a14:hiddenLine xmlns:a14="http://schemas.microsoft.com/office/drawing/2010/main" xmlns="" w="9525">
                     <a:solidFill>
                       <a:srgbClr val="000000"/>
                     </a:solidFill>
@@ -12334,7 +12334,7 @@
               </a:ln>
               <a:extLst>
                 <a:ext uri="{91240B29-F687-4f45-9708-019B960494DF}">
-                  <a14:hiddenLine xmlns="" xmlns:a14="http://schemas.microsoft.com/office/drawing/2010/main" w="9525">
+                  <a14:hiddenLine xmlns:a14="http://schemas.microsoft.com/office/drawing/2010/main" xmlns="" w="9525">
                     <a:solidFill>
                       <a:srgbClr val="000000"/>
                     </a:solidFill>
@@ -12474,7 +12474,7 @@
           <a:p>
             <a:fld id="{62DA8015-F4DF-264C-B6A2-A0129953FA2D}" type="datetime1">
               <a:rPr lang="en-US" smtClean="0"/>
-              <a:t>10/7/25</a:t>
+              <a:t>10/20/25</a:t>
             </a:fld>
             <a:endParaRPr lang="en-US"/>
           </a:p>
